--- a/Systems Analyst Capstone Project/Final SubmissionDL.pptx
+++ b/Systems Analyst Capstone Project/Final SubmissionDL.pptx
@@ -1245,7 +1245,7 @@
           <a:p>
             <a:fld id="{C53E7DFC-5F54-412C-A0CF-699F8379DFE2}" type="datetimeFigureOut">
               <a:rPr lang="en-IN" smtClean="0"/>
-              <a:t>04-09-2025</a:t>
+              <a:t>05-09-2025</a:t>
             </a:fld>
             <a:endParaRPr lang="en-IN"/>
           </a:p>
@@ -1760,7 +1760,7 @@
             <a:blip r:embed="rId2">
               <a:extLst>
                 <a:ext uri="{96DAC541-7B7A-43D3-8B79-37D633B846F1}">
-                  <asvg:svgBlip xmlns="" xmlns:asvg="http://schemas.microsoft.com/office/drawing/2016/SVG/main" r:embed="rId3"/>
+                  <asvg:svgBlip xmlns:asvg="http://schemas.microsoft.com/office/drawing/2016/SVG/main" xmlns="" r:embed="rId3"/>
                 </a:ext>
               </a:extLst>
             </a:blip>
@@ -1825,7 +1825,7 @@
             <a:blip r:embed="rId2">
               <a:extLst>
                 <a:ext uri="{96DAC541-7B7A-43D3-8B79-37D633B846F1}">
-                  <asvg:svgBlip xmlns="" xmlns:asvg="http://schemas.microsoft.com/office/drawing/2016/SVG/main" r:embed="rId3"/>
+                  <asvg:svgBlip xmlns:asvg="http://schemas.microsoft.com/office/drawing/2016/SVG/main" xmlns="" r:embed="rId3"/>
                 </a:ext>
               </a:extLst>
             </a:blip>
@@ -2075,7 +2075,7 @@
             <a:blip r:embed="rId2">
               <a:extLst>
                 <a:ext uri="{96DAC541-7B7A-43D3-8B79-37D633B846F1}">
-                  <asvg:svgBlip xmlns="" xmlns:asvg="http://schemas.microsoft.com/office/drawing/2016/SVG/main" r:embed="rId3"/>
+                  <asvg:svgBlip xmlns:asvg="http://schemas.microsoft.com/office/drawing/2016/SVG/main" xmlns="" r:embed="rId3"/>
                 </a:ext>
               </a:extLst>
             </a:blip>
@@ -2140,7 +2140,7 @@
             <a:blip r:embed="rId2">
               <a:extLst>
                 <a:ext uri="{96DAC541-7B7A-43D3-8B79-37D633B846F1}">
-                  <asvg:svgBlip xmlns="" xmlns:asvg="http://schemas.microsoft.com/office/drawing/2016/SVG/main" r:embed="rId3"/>
+                  <asvg:svgBlip xmlns:asvg="http://schemas.microsoft.com/office/drawing/2016/SVG/main" xmlns="" r:embed="rId3"/>
                 </a:ext>
               </a:extLst>
             </a:blip>
@@ -2494,7 +2494,7 @@
             <a:blip r:embed="rId2">
               <a:extLst>
                 <a:ext uri="{96DAC541-7B7A-43D3-8B79-37D633B846F1}">
-                  <asvg:svgBlip xmlns="" xmlns:asvg="http://schemas.microsoft.com/office/drawing/2016/SVG/main" r:embed="rId3"/>
+                  <asvg:svgBlip xmlns:asvg="http://schemas.microsoft.com/office/drawing/2016/SVG/main" xmlns="" r:embed="rId3"/>
                 </a:ext>
               </a:extLst>
             </a:blip>
@@ -2782,7 +2782,7 @@
             <a:blip r:embed="rId2">
               <a:extLst>
                 <a:ext uri="{96DAC541-7B7A-43D3-8B79-37D633B846F1}">
-                  <asvg:svgBlip xmlns="" xmlns:asvg="http://schemas.microsoft.com/office/drawing/2016/SVG/main" r:embed="rId3"/>
+                  <asvg:svgBlip xmlns:asvg="http://schemas.microsoft.com/office/drawing/2016/SVG/main" xmlns="" r:embed="rId3"/>
                 </a:ext>
               </a:extLst>
             </a:blip>
@@ -3064,7 +3064,7 @@
             <a:blip r:embed="rId2">
               <a:extLst>
                 <a:ext uri="{96DAC541-7B7A-43D3-8B79-37D633B846F1}">
-                  <asvg:svgBlip xmlns="" xmlns:asvg="http://schemas.microsoft.com/office/drawing/2016/SVG/main" r:embed="rId3"/>
+                  <asvg:svgBlip xmlns:asvg="http://schemas.microsoft.com/office/drawing/2016/SVG/main" xmlns="" r:embed="rId3"/>
                 </a:ext>
               </a:extLst>
             </a:blip>
@@ -3273,7 +3273,7 @@
           <a:p>
             <a:fld id="{CB937118-AA9C-D947-A395-0A8492468232}" type="datetimeFigureOut">
               <a:rPr lang="en-US" smtClean="0"/>
-              <a:t>9/4/2025</a:t>
+              <a:t>9/5/2025</a:t>
             </a:fld>
             <a:endParaRPr lang="en-US"/>
           </a:p>
@@ -3586,7 +3586,7 @@
           <a:p>
             <a:fld id="{CA5D1529-08C7-4C99-9E99-20E4A08C4BFB}" type="datetimeFigureOut">
               <a:rPr lang="en-IN" smtClean="0"/>
-              <a:t>04-09-2025</a:t>
+              <a:t>05-09-2025</a:t>
             </a:fld>
             <a:endParaRPr lang="en-IN"/>
           </a:p>
@@ -16963,16 +16963,18 @@
             <a:pPr marL="0" indent="0">
               <a:buNone/>
             </a:pPr>
-            <a:r>
-              <a:rPr lang="en-US" sz="1800" dirty="0">
-                <a:highlight>
-                  <a:srgbClr val="FFFF00"/>
-                </a:highlight>
-                <a:ea typeface="+mn-lt"/>
-                <a:cs typeface="+mn-lt"/>
-              </a:rPr>
-              <a:t>[Insert the high-level DFD illustrating system processes and data flows.]</a:t>
-            </a:r>
+            <a:endParaRPr lang="en-US" sz="1800" dirty="0">
+              <a:highlight>
+                <a:srgbClr val="FFFF00"/>
+              </a:highlight>
+              <a:ea typeface="+mn-lt"/>
+              <a:cs typeface="+mn-lt"/>
+            </a:endParaRPr>
+          </a:p>
+          <a:p>
+            <a:pPr marL="0" indent="0">
+              <a:buNone/>
+            </a:pPr>
             <a:endParaRPr lang="en-US" sz="1800" dirty="0">
               <a:highlight>
                 <a:srgbClr val="FFFF00"/>
@@ -16982,6 +16984,36 @@
           </a:p>
         </p:txBody>
       </p:sp>
+      <p:pic>
+        <p:nvPicPr>
+          <p:cNvPr id="2" name="Picture 1"/>
+          <p:cNvPicPr>
+            <a:picLocks noChangeAspect="1"/>
+          </p:cNvPicPr>
+          <p:nvPr/>
+        </p:nvPicPr>
+        <p:blipFill>
+          <a:blip r:embed="rId2">
+            <a:extLst>
+              <a:ext uri="{28A0092B-C50C-407E-A947-70E740481C1C}">
+                <a14:useLocalDpi xmlns:a14="http://schemas.microsoft.com/office/drawing/2010/main" val="0"/>
+              </a:ext>
+            </a:extLst>
+          </a:blip>
+          <a:stretch>
+            <a:fillRect/>
+          </a:stretch>
+        </p:blipFill>
+        <p:spPr>
+          <a:xfrm>
+            <a:off x="315729" y="937835"/>
+            <a:ext cx="11560542" cy="5060118"/>
+          </a:xfrm>
+          <a:prstGeom prst="rect">
+            <a:avLst/>
+          </a:prstGeom>
+        </p:spPr>
+      </p:pic>
     </p:spTree>
     <p:extLst>
       <p:ext uri="{BB962C8B-B14F-4D97-AF65-F5344CB8AC3E}">
@@ -17261,26 +17293,71 @@
             </a:pPr>
             <a:r>
               <a:rPr lang="en-US" sz="2400" b="1" dirty="0"/>
-              <a:t>Level 1 DFD</a:t>
+              <a:t>Level 1 </a:t>
             </a:r>
+            <a:r>
+              <a:rPr lang="en-US" sz="2400" b="1" dirty="0" smtClean="0"/>
+              <a:t>DFD</a:t>
+            </a:r>
+          </a:p>
+          <a:p>
+            <a:pPr marL="0" indent="0">
+              <a:buFont typeface="Arial" panose="020B0604020202020204" pitchFamily="34" charset="0"/>
+              <a:buNone/>
+            </a:pPr>
+            <a:endParaRPr lang="en-US" sz="2400" b="1" dirty="0"/>
+          </a:p>
+          <a:p>
+            <a:pPr marL="0" indent="0">
+              <a:buFont typeface="Arial" panose="020B0604020202020204" pitchFamily="34" charset="0"/>
+              <a:buNone/>
+            </a:pPr>
+            <a:endParaRPr lang="en-US" sz="2400" b="1" dirty="0"/>
           </a:p>
           <a:p>
             <a:pPr marL="0" indent="0">
               <a:buNone/>
             </a:pPr>
-            <a:r>
-              <a:rPr lang="en-US" sz="1800" dirty="0">
-                <a:highlight>
-                  <a:srgbClr val="FFFF00"/>
-                </a:highlight>
-                <a:ea typeface="+mn-lt"/>
-                <a:cs typeface="+mn-lt"/>
-              </a:rPr>
-              <a:t>[Include the detailed DFD showing subprocesses and data exchanges.]</a:t>
-            </a:r>
+            <a:endParaRPr lang="en-US" sz="1800" dirty="0">
+              <a:highlight>
+                <a:srgbClr val="FFFF00"/>
+              </a:highlight>
+              <a:ea typeface="+mn-lt"/>
+              <a:cs typeface="+mn-lt"/>
+            </a:endParaRPr>
           </a:p>
         </p:txBody>
       </p:sp>
+      <p:pic>
+        <p:nvPicPr>
+          <p:cNvPr id="2" name="Picture 1"/>
+          <p:cNvPicPr>
+            <a:picLocks noChangeAspect="1"/>
+          </p:cNvPicPr>
+          <p:nvPr/>
+        </p:nvPicPr>
+        <p:blipFill>
+          <a:blip r:embed="rId2">
+            <a:extLst>
+              <a:ext uri="{28A0092B-C50C-407E-A947-70E740481C1C}">
+                <a14:useLocalDpi xmlns:a14="http://schemas.microsoft.com/office/drawing/2010/main" val="0"/>
+              </a:ext>
+            </a:extLst>
+          </a:blip>
+          <a:stretch>
+            <a:fillRect/>
+          </a:stretch>
+        </p:blipFill>
+        <p:spPr>
+          <a:xfrm>
+            <a:off x="572756" y="1789888"/>
+            <a:ext cx="11256078" cy="4406631"/>
+          </a:xfrm>
+          <a:prstGeom prst="rect">
+            <a:avLst/>
+          </a:prstGeom>
+        </p:spPr>
+      </p:pic>
     </p:spTree>
     <p:extLst>
       <p:ext uri="{BB962C8B-B14F-4D97-AF65-F5344CB8AC3E}">
@@ -17567,16 +17644,17 @@
             <a:pPr marL="0" indent="0">
               <a:buNone/>
             </a:pPr>
-            <a:r>
-              <a:rPr lang="en-US" sz="1800" dirty="0">
-                <a:highlight>
-                  <a:srgbClr val="FFFF00"/>
-                </a:highlight>
-                <a:ea typeface="+mn-lt"/>
-                <a:cs typeface="+mn-lt"/>
-              </a:rPr>
-              <a:t>[Add the ERD showing entities, attributes, and relationships.]</a:t>
-            </a:r>
+            <a:endParaRPr lang="en-US" sz="1800" dirty="0" smtClean="0">
+              <a:highlight>
+                <a:srgbClr val="FFFF00"/>
+              </a:highlight>
+              <a:cs typeface="Arial"/>
+            </a:endParaRPr>
+          </a:p>
+          <a:p>
+            <a:pPr marL="0" indent="0">
+              <a:buNone/>
+            </a:pPr>
             <a:endParaRPr lang="en-US" sz="1800" dirty="0">
               <a:highlight>
                 <a:srgbClr val="FFFF00"/>
@@ -17586,6 +17664,36 @@
           </a:p>
         </p:txBody>
       </p:sp>
+      <p:pic>
+        <p:nvPicPr>
+          <p:cNvPr id="2" name="Picture 1"/>
+          <p:cNvPicPr>
+            <a:picLocks noChangeAspect="1"/>
+          </p:cNvPicPr>
+          <p:nvPr/>
+        </p:nvPicPr>
+        <p:blipFill>
+          <a:blip r:embed="rId2">
+            <a:extLst>
+              <a:ext uri="{28A0092B-C50C-407E-A947-70E740481C1C}">
+                <a14:useLocalDpi xmlns:a14="http://schemas.microsoft.com/office/drawing/2010/main" val="0"/>
+              </a:ext>
+            </a:extLst>
+          </a:blip>
+          <a:stretch>
+            <a:fillRect/>
+          </a:stretch>
+        </p:blipFill>
+        <p:spPr>
+          <a:xfrm>
+            <a:off x="572756" y="1581247"/>
+            <a:ext cx="9865825" cy="4613245"/>
+          </a:xfrm>
+          <a:prstGeom prst="rect">
+            <a:avLst/>
+          </a:prstGeom>
+        </p:spPr>
+      </p:pic>
     </p:spTree>
     <p:extLst>
       <p:ext uri="{BB962C8B-B14F-4D97-AF65-F5344CB8AC3E}">
@@ -17872,19 +17980,46 @@
             <a:pPr marL="0" indent="0">
               <a:buNone/>
             </a:pPr>
-            <a:r>
-              <a:rPr lang="en-US" sz="1800" dirty="0">
-                <a:highlight>
-                  <a:srgbClr val="FFFF00"/>
-                </a:highlight>
-                <a:ea typeface="+mn-lt"/>
-                <a:cs typeface="+mn-lt"/>
-              </a:rPr>
-              <a:t>[Insert the UML use case diagram for system interactions.]</a:t>
-            </a:r>
+            <a:endParaRPr lang="en-US" sz="1800" dirty="0">
+              <a:highlight>
+                <a:srgbClr val="FFFF00"/>
+              </a:highlight>
+              <a:ea typeface="+mn-lt"/>
+              <a:cs typeface="+mn-lt"/>
+            </a:endParaRPr>
           </a:p>
         </p:txBody>
       </p:sp>
+      <p:pic>
+        <p:nvPicPr>
+          <p:cNvPr id="2" name="Picture 1"/>
+          <p:cNvPicPr>
+            <a:picLocks noChangeAspect="1"/>
+          </p:cNvPicPr>
+          <p:nvPr/>
+        </p:nvPicPr>
+        <p:blipFill>
+          <a:blip r:embed="rId2">
+            <a:extLst>
+              <a:ext uri="{28A0092B-C50C-407E-A947-70E740481C1C}">
+                <a14:useLocalDpi xmlns:a14="http://schemas.microsoft.com/office/drawing/2010/main" val="0"/>
+              </a:ext>
+            </a:extLst>
+          </a:blip>
+          <a:stretch>
+            <a:fillRect/>
+          </a:stretch>
+        </p:blipFill>
+        <p:spPr>
+          <a:xfrm>
+            <a:off x="885217" y="1640040"/>
+            <a:ext cx="8742714" cy="4577402"/>
+          </a:xfrm>
+          <a:prstGeom prst="rect">
+            <a:avLst/>
+          </a:prstGeom>
+        </p:spPr>
+      </p:pic>
     </p:spTree>
     <p:extLst>
       <p:ext uri="{BB962C8B-B14F-4D97-AF65-F5344CB8AC3E}">
@@ -18395,23 +18530,31 @@
             </a:pPr>
             <a:r>
               <a:rPr lang="en-US" sz="2400" b="1" dirty="0"/>
-              <a:t>Sequence Diagram</a:t>
+              <a:t>Sequence </a:t>
             </a:r>
+            <a:r>
+              <a:rPr lang="en-US" sz="2400" b="1" dirty="0" smtClean="0"/>
+              <a:t>Diagram</a:t>
+            </a:r>
+          </a:p>
+          <a:p>
+            <a:pPr marL="0" indent="0">
+              <a:buFont typeface="Arial" panose="020B0604020202020204" pitchFamily="34" charset="0"/>
+              <a:buNone/>
+            </a:pPr>
+            <a:endParaRPr lang="en-US" sz="2400" b="1" dirty="0"/>
+          </a:p>
+          <a:p>
+            <a:pPr marL="0" indent="0">
+              <a:buFont typeface="Arial" panose="020B0604020202020204" pitchFamily="34" charset="0"/>
+              <a:buNone/>
+            </a:pPr>
+            <a:endParaRPr lang="en-US" sz="2400" b="1" dirty="0"/>
           </a:p>
           <a:p>
             <a:pPr marL="0" indent="0">
               <a:buNone/>
             </a:pPr>
-            <a:r>
-              <a:rPr lang="en-US" sz="1800" dirty="0">
-                <a:highlight>
-                  <a:srgbClr val="FFFF00"/>
-                </a:highlight>
-                <a:ea typeface="+mn-lt"/>
-                <a:cs typeface="+mn-lt"/>
-              </a:rPr>
-              <a:t>[Include the sequence diagram showing the flow of interactions over time.]</a:t>
-            </a:r>
             <a:endParaRPr lang="en-US" sz="1800" dirty="0">
               <a:highlight>
                 <a:srgbClr val="FFFF00"/>
@@ -18421,6 +18564,36 @@
           </a:p>
         </p:txBody>
       </p:sp>
+      <p:pic>
+        <p:nvPicPr>
+          <p:cNvPr id="2" name="Picture 1"/>
+          <p:cNvPicPr>
+            <a:picLocks noChangeAspect="1"/>
+          </p:cNvPicPr>
+          <p:nvPr/>
+        </p:nvPicPr>
+        <p:blipFill>
+          <a:blip r:embed="rId2">
+            <a:extLst>
+              <a:ext uri="{28A0092B-C50C-407E-A947-70E740481C1C}">
+                <a14:useLocalDpi xmlns:a14="http://schemas.microsoft.com/office/drawing/2010/main" val="0"/>
+              </a:ext>
+            </a:extLst>
+          </a:blip>
+          <a:stretch>
+            <a:fillRect/>
+          </a:stretch>
+        </p:blipFill>
+        <p:spPr>
+          <a:xfrm>
+            <a:off x="972766" y="1770859"/>
+            <a:ext cx="9902757" cy="4509340"/>
+          </a:xfrm>
+          <a:prstGeom prst="rect">
+            <a:avLst/>
+          </a:prstGeom>
+        </p:spPr>
+      </p:pic>
     </p:spTree>
     <p:extLst>
       <p:ext uri="{BB962C8B-B14F-4D97-AF65-F5344CB8AC3E}">
@@ -18707,19 +18880,46 @@
             <a:pPr marL="0" indent="0">
               <a:buNone/>
             </a:pPr>
-            <a:r>
-              <a:rPr lang="en-US" sz="1800" dirty="0">
-                <a:highlight>
-                  <a:srgbClr val="FFFF00"/>
-                </a:highlight>
-                <a:ea typeface="+mn-lt"/>
-                <a:cs typeface="+mn-lt"/>
-              </a:rPr>
-              <a:t>[Present the conceptual ERD defining high-level entities and relationships.]</a:t>
-            </a:r>
+            <a:endParaRPr lang="en-US" sz="1800" dirty="0">
+              <a:highlight>
+                <a:srgbClr val="FFFF00"/>
+              </a:highlight>
+              <a:ea typeface="+mn-lt"/>
+              <a:cs typeface="+mn-lt"/>
+            </a:endParaRPr>
           </a:p>
         </p:txBody>
       </p:sp>
+      <p:pic>
+        <p:nvPicPr>
+          <p:cNvPr id="2" name="Picture 1"/>
+          <p:cNvPicPr>
+            <a:picLocks noChangeAspect="1"/>
+          </p:cNvPicPr>
+          <p:nvPr/>
+        </p:nvPicPr>
+        <p:blipFill>
+          <a:blip r:embed="rId2">
+            <a:extLst>
+              <a:ext uri="{28A0092B-C50C-407E-A947-70E740481C1C}">
+                <a14:useLocalDpi xmlns:a14="http://schemas.microsoft.com/office/drawing/2010/main" val="0"/>
+              </a:ext>
+            </a:extLst>
+          </a:blip>
+          <a:stretch>
+            <a:fillRect/>
+          </a:stretch>
+        </p:blipFill>
+        <p:spPr>
+          <a:xfrm>
+            <a:off x="466928" y="1682191"/>
+            <a:ext cx="8776150" cy="4669509"/>
+          </a:xfrm>
+          <a:prstGeom prst="rect">
+            <a:avLst/>
+          </a:prstGeom>
+        </p:spPr>
+      </p:pic>
     </p:spTree>
     <p:extLst>
       <p:ext uri="{BB962C8B-B14F-4D97-AF65-F5344CB8AC3E}">
@@ -19006,19 +19206,46 @@
             <a:pPr marL="0" indent="0">
               <a:buNone/>
             </a:pPr>
-            <a:r>
-              <a:rPr lang="en-US" sz="1800" dirty="0">
-                <a:highlight>
-                  <a:srgbClr val="FFFF00"/>
-                </a:highlight>
-                <a:ea typeface="+mn-lt"/>
-                <a:cs typeface="+mn-lt"/>
-              </a:rPr>
-              <a:t>[Insert the logical ERD with detailed attributes and relationships.]</a:t>
-            </a:r>
+            <a:endParaRPr lang="en-US" sz="1800" dirty="0">
+              <a:highlight>
+                <a:srgbClr val="FFFF00"/>
+              </a:highlight>
+              <a:ea typeface="+mn-lt"/>
+              <a:cs typeface="+mn-lt"/>
+            </a:endParaRPr>
           </a:p>
         </p:txBody>
       </p:sp>
+      <p:pic>
+        <p:nvPicPr>
+          <p:cNvPr id="2" name="Picture 1"/>
+          <p:cNvPicPr>
+            <a:picLocks noChangeAspect="1"/>
+          </p:cNvPicPr>
+          <p:nvPr/>
+        </p:nvPicPr>
+        <p:blipFill>
+          <a:blip r:embed="rId2">
+            <a:extLst>
+              <a:ext uri="{28A0092B-C50C-407E-A947-70E740481C1C}">
+                <a14:useLocalDpi xmlns:a14="http://schemas.microsoft.com/office/drawing/2010/main" val="0"/>
+              </a:ext>
+            </a:extLst>
+          </a:blip>
+          <a:stretch>
+            <a:fillRect/>
+          </a:stretch>
+        </p:blipFill>
+        <p:spPr>
+          <a:xfrm>
+            <a:off x="1012514" y="1624519"/>
+            <a:ext cx="8933930" cy="4720368"/>
+          </a:xfrm>
+          <a:prstGeom prst="rect">
+            <a:avLst/>
+          </a:prstGeom>
+        </p:spPr>
+      </p:pic>
     </p:spTree>
     <p:extLst>
       <p:ext uri="{BB962C8B-B14F-4D97-AF65-F5344CB8AC3E}">
@@ -19305,16 +19532,6 @@
             <a:pPr marL="0" indent="0">
               <a:buNone/>
             </a:pPr>
-            <a:r>
-              <a:rPr lang="en-US" sz="1800" dirty="0">
-                <a:highlight>
-                  <a:srgbClr val="FFFF00"/>
-                </a:highlight>
-                <a:ea typeface="+mn-lt"/>
-                <a:cs typeface="+mn-lt"/>
-              </a:rPr>
-              <a:t>[Include a table with key fields, data types, and descriptions.]</a:t>
-            </a:r>
             <a:endParaRPr lang="en-US" sz="1800" dirty="0">
               <a:highlight>
                 <a:srgbClr val="FFFF00"/>
@@ -19324,6 +19541,36 @@
           </a:p>
         </p:txBody>
       </p:sp>
+      <p:pic>
+        <p:nvPicPr>
+          <p:cNvPr id="2" name="Picture 1"/>
+          <p:cNvPicPr>
+            <a:picLocks noChangeAspect="1"/>
+          </p:cNvPicPr>
+          <p:nvPr/>
+        </p:nvPicPr>
+        <p:blipFill>
+          <a:blip r:embed="rId2">
+            <a:extLst>
+              <a:ext uri="{28A0092B-C50C-407E-A947-70E740481C1C}">
+                <a14:useLocalDpi xmlns:a14="http://schemas.microsoft.com/office/drawing/2010/main" val="0"/>
+              </a:ext>
+            </a:extLst>
+          </a:blip>
+          <a:stretch>
+            <a:fillRect/>
+          </a:stretch>
+        </p:blipFill>
+        <p:spPr>
+          <a:xfrm>
+            <a:off x="233464" y="984669"/>
+            <a:ext cx="11867745" cy="5065637"/>
+          </a:xfrm>
+          <a:prstGeom prst="rect">
+            <a:avLst/>
+          </a:prstGeom>
+        </p:spPr>
+      </p:pic>
     </p:spTree>
     <p:extLst>
       <p:ext uri="{BB962C8B-B14F-4D97-AF65-F5344CB8AC3E}">
@@ -19378,8 +19625,8 @@
         </p:nvSpPr>
         <p:spPr>
           <a:xfrm>
-            <a:off x="572756" y="133943"/>
-            <a:ext cx="9813446" cy="850726"/>
+            <a:off x="572756" y="133942"/>
+            <a:ext cx="9813446" cy="819369"/>
           </a:xfrm>
         </p:spPr>
         <p:txBody>
@@ -19603,29 +19850,26 @@
             </a:pPr>
             <a:r>
               <a:rPr lang="en-US" sz="2400" b="1" dirty="0"/>
-              <a:t>Test Plan</a:t>
+              <a:t>Test </a:t>
+            </a:r>
+            <a:r>
+              <a:rPr lang="en-US" sz="2400" b="1" dirty="0" smtClean="0"/>
+              <a:t>Plan</a:t>
             </a:r>
           </a:p>
           <a:p>
             <a:pPr marL="0" indent="0">
+              <a:buFont typeface="Arial" panose="020B0604020202020204" pitchFamily="34" charset="0"/>
               <a:buNone/>
             </a:pPr>
-            <a:r>
-              <a:rPr lang="en-US" sz="1800" dirty="0">
-                <a:highlight>
-                  <a:srgbClr val="FFFF00"/>
-                </a:highlight>
-                <a:ea typeface="+mn-lt"/>
-                <a:cs typeface="+mn-lt"/>
-              </a:rPr>
-              <a:t>[Summarize the testing scope, approach, and key activities.]</a:t>
-            </a:r>
-            <a:endParaRPr lang="en-US" sz="1800" dirty="0">
-              <a:highlight>
-                <a:srgbClr val="FFFF00"/>
-              </a:highlight>
-              <a:cs typeface="Arial"/>
-            </a:endParaRPr>
+            <a:endParaRPr lang="en-US" sz="2400" b="1" dirty="0"/>
+          </a:p>
+          <a:p>
+            <a:pPr marL="0" indent="0">
+              <a:buFont typeface="Arial" panose="020B0604020202020204" pitchFamily="34" charset="0"/>
+              <a:buNone/>
+            </a:pPr>
+            <a:endParaRPr lang="en-US" sz="2400" b="1" dirty="0"/>
           </a:p>
         </p:txBody>
       </p:sp>

--- a/Systems Analyst Capstone Project/Final SubmissionDL.pptx
+++ b/Systems Analyst Capstone Project/Final SubmissionDL.pptx
@@ -5,7 +5,7 @@
     <p:sldMasterId id="2147483648" r:id="rId1"/>
   </p:sldMasterIdLst>
   <p:notesMasterIdLst>
-    <p:notesMasterId r:id="rId46"/>
+    <p:notesMasterId r:id="rId44"/>
   </p:notesMasterIdLst>
   <p:sldIdLst>
     <p:sldId id="258" r:id="rId2"/>
@@ -50,8 +50,6 @@
     <p:sldId id="404" r:id="rId41"/>
     <p:sldId id="405" r:id="rId42"/>
     <p:sldId id="406" r:id="rId43"/>
-    <p:sldId id="257" r:id="rId44"/>
-    <p:sldId id="259" r:id="rId45"/>
   </p:sldIdLst>
   <p:sldSz cx="12192000" cy="6858000"/>
   <p:notesSz cx="6858000" cy="9144000"/>
@@ -1760,7 +1758,7 @@
             <a:blip r:embed="rId2">
               <a:extLst>
                 <a:ext uri="{96DAC541-7B7A-43D3-8B79-37D633B846F1}">
-                  <asvg:svgBlip xmlns:asvg="http://schemas.microsoft.com/office/drawing/2016/SVG/main" xmlns="" r:embed="rId3"/>
+                  <asvg:svgBlip xmlns="" xmlns:asvg="http://schemas.microsoft.com/office/drawing/2016/SVG/main" r:embed="rId3"/>
                 </a:ext>
               </a:extLst>
             </a:blip>
@@ -1825,7 +1823,7 @@
             <a:blip r:embed="rId2">
               <a:extLst>
                 <a:ext uri="{96DAC541-7B7A-43D3-8B79-37D633B846F1}">
-                  <asvg:svgBlip xmlns:asvg="http://schemas.microsoft.com/office/drawing/2016/SVG/main" xmlns="" r:embed="rId3"/>
+                  <asvg:svgBlip xmlns="" xmlns:asvg="http://schemas.microsoft.com/office/drawing/2016/SVG/main" r:embed="rId3"/>
                 </a:ext>
               </a:extLst>
             </a:blip>
@@ -2075,7 +2073,7 @@
             <a:blip r:embed="rId2">
               <a:extLst>
                 <a:ext uri="{96DAC541-7B7A-43D3-8B79-37D633B846F1}">
-                  <asvg:svgBlip xmlns:asvg="http://schemas.microsoft.com/office/drawing/2016/SVG/main" xmlns="" r:embed="rId3"/>
+                  <asvg:svgBlip xmlns="" xmlns:asvg="http://schemas.microsoft.com/office/drawing/2016/SVG/main" r:embed="rId3"/>
                 </a:ext>
               </a:extLst>
             </a:blip>
@@ -2140,7 +2138,7 @@
             <a:blip r:embed="rId2">
               <a:extLst>
                 <a:ext uri="{96DAC541-7B7A-43D3-8B79-37D633B846F1}">
-                  <asvg:svgBlip xmlns:asvg="http://schemas.microsoft.com/office/drawing/2016/SVG/main" xmlns="" r:embed="rId3"/>
+                  <asvg:svgBlip xmlns="" xmlns:asvg="http://schemas.microsoft.com/office/drawing/2016/SVG/main" r:embed="rId3"/>
                 </a:ext>
               </a:extLst>
             </a:blip>
@@ -2494,7 +2492,7 @@
             <a:blip r:embed="rId2">
               <a:extLst>
                 <a:ext uri="{96DAC541-7B7A-43D3-8B79-37D633B846F1}">
-                  <asvg:svgBlip xmlns:asvg="http://schemas.microsoft.com/office/drawing/2016/SVG/main" xmlns="" r:embed="rId3"/>
+                  <asvg:svgBlip xmlns="" xmlns:asvg="http://schemas.microsoft.com/office/drawing/2016/SVG/main" r:embed="rId3"/>
                 </a:ext>
               </a:extLst>
             </a:blip>
@@ -2782,7 +2780,7 @@
             <a:blip r:embed="rId2">
               <a:extLst>
                 <a:ext uri="{96DAC541-7B7A-43D3-8B79-37D633B846F1}">
-                  <asvg:svgBlip xmlns:asvg="http://schemas.microsoft.com/office/drawing/2016/SVG/main" xmlns="" r:embed="rId3"/>
+                  <asvg:svgBlip xmlns="" xmlns:asvg="http://schemas.microsoft.com/office/drawing/2016/SVG/main" r:embed="rId3"/>
                 </a:ext>
               </a:extLst>
             </a:blip>
@@ -3064,7 +3062,7 @@
             <a:blip r:embed="rId2">
               <a:extLst>
                 <a:ext uri="{96DAC541-7B7A-43D3-8B79-37D633B846F1}">
-                  <asvg:svgBlip xmlns:asvg="http://schemas.microsoft.com/office/drawing/2016/SVG/main" xmlns="" r:embed="rId3"/>
+                  <asvg:svgBlip xmlns="" xmlns:asvg="http://schemas.microsoft.com/office/drawing/2016/SVG/main" r:embed="rId3"/>
                 </a:ext>
               </a:extLst>
             </a:blip>
@@ -6841,7 +6839,7 @@
         </p:spPr>
         <p:txBody>
           <a:bodyPr vert="horz" lIns="91440" tIns="45720" rIns="91440" bIns="45720" rtlCol="0" anchor="t">
-            <a:normAutofit/>
+            <a:normAutofit lnSpcReduction="10000"/>
           </a:bodyPr>
           <a:lstStyle>
             <a:lvl1pPr marL="228600" indent="-228600" algn="l" defTabSz="914400" rtl="0" eaLnBrk="1" latinLnBrk="0" hangingPunct="1">
@@ -7043,48 +7041,31 @@
               <a:buNone/>
             </a:pPr>
             <a:r>
-              <a:rPr lang="en-US" sz="2000" dirty="0" smtClean="0">
-                <a:highlight>
-                  <a:srgbClr val="FFFF00"/>
-                </a:highlight>
-                <a:cs typeface="Arial"/>
-              </a:rPr>
-              <a:t>Start      v1.1.1 </a:t>
-            </a:r>
-            <a:r>
-              <a:rPr lang="en-US" sz="2000" dirty="0">
-                <a:highlight>
-                  <a:srgbClr val="FFFF00"/>
-                </a:highlight>
-                <a:cs typeface="Arial"/>
-              </a:rPr>
+              <a:rPr lang="en-US" sz="2000" dirty="0"/>
+              <a:t>Start      </a:t>
+            </a:r>
+            <a:r>
+              <a:rPr lang="en-US" sz="2000" dirty="0" smtClean="0"/>
+              <a:t> v1.1.1 </a:t>
+            </a:r>
+            <a:r>
+              <a:rPr lang="en-US" sz="2000" dirty="0"/>
               <a:t>Identify stakeholders </a:t>
             </a:r>
             <a:r>
-              <a:rPr lang="en-US" sz="2000" dirty="0" smtClean="0">
-                <a:highlight>
-                  <a:srgbClr val="FFFF00"/>
-                </a:highlight>
-                <a:cs typeface="Arial"/>
-              </a:rPr>
-              <a:t>    v1.1.2 </a:t>
-            </a:r>
-            <a:r>
-              <a:rPr lang="en-US" sz="2000" dirty="0">
-                <a:highlight>
-                  <a:srgbClr val="FFFF00"/>
-                </a:highlight>
-                <a:cs typeface="Arial"/>
-              </a:rPr>
+              <a:rPr lang="en-US" sz="2000" dirty="0"/>
+              <a:t>    </a:t>
+            </a:r>
+            <a:r>
+              <a:rPr lang="en-US" sz="2000" dirty="0" smtClean="0"/>
+              <a:t>      v1.1.2 </a:t>
+            </a:r>
+            <a:r>
+              <a:rPr lang="en-US" sz="2000" dirty="0"/>
               <a:t>Define </a:t>
             </a:r>
             <a:r>
-              <a:rPr lang="en-US" sz="2000" dirty="0" smtClean="0">
-                <a:highlight>
-                  <a:srgbClr val="FFFF00"/>
-                </a:highlight>
-                <a:cs typeface="Arial"/>
-              </a:rPr>
+              <a:rPr lang="en-US" sz="2000" dirty="0"/>
               <a:t>requirements</a:t>
             </a:r>
           </a:p>
@@ -7104,61 +7085,26 @@
               <a:buNone/>
             </a:pPr>
             <a:r>
-              <a:rPr lang="en-US" sz="2000" dirty="0" smtClean="0">
-                <a:highlight>
-                  <a:srgbClr val="FFFF00"/>
-                </a:highlight>
-                <a:cs typeface="Arial"/>
-              </a:rPr>
+              <a:rPr lang="en-US" sz="2000" dirty="0"/>
               <a:t>v1.1.3 </a:t>
             </a:r>
             <a:r>
-              <a:rPr lang="en-US" sz="2000" dirty="0">
-                <a:highlight>
-                  <a:srgbClr val="FFFF00"/>
-                </a:highlight>
-                <a:cs typeface="Arial"/>
-              </a:rPr>
+              <a:rPr lang="en-US" sz="2000" dirty="0"/>
               <a:t>Develop project </a:t>
             </a:r>
             <a:r>
-              <a:rPr lang="en-US" sz="2000" dirty="0" smtClean="0">
-                <a:highlight>
-                  <a:srgbClr val="FFFF00"/>
-                </a:highlight>
-                <a:cs typeface="Arial"/>
-              </a:rPr>
+              <a:rPr lang="en-US" sz="2000" dirty="0"/>
               <a:t>plan         v1.1.4 </a:t>
             </a:r>
             <a:r>
-              <a:rPr lang="en-US" sz="2000" dirty="0">
-                <a:highlight>
-                  <a:srgbClr val="FFFF00"/>
-                </a:highlight>
-                <a:cs typeface="Arial"/>
-              </a:rPr>
+              <a:rPr lang="en-US" sz="2000" dirty="0"/>
               <a:t>Design database </a:t>
             </a:r>
-            <a:endParaRPr lang="en-US" sz="2000" dirty="0" smtClean="0">
-              <a:highlight>
-                <a:srgbClr val="FFFF00"/>
-              </a:highlight>
-              <a:cs typeface="Arial"/>
-            </a:endParaRPr>
-          </a:p>
-          <a:p>
-            <a:pPr marL="0" indent="0">
-              <a:buNone/>
-            </a:pPr>
-            <a:r>
-              <a:rPr lang="en-US" sz="2000" dirty="0" smtClean="0">
-                <a:highlight>
-                  <a:srgbClr val="FFFF00"/>
-                </a:highlight>
-                <a:cs typeface="Arial"/>
-              </a:rPr>
+            <a:r>
+              <a:rPr lang="en-US" sz="2000" dirty="0" smtClean="0"/>
               <a:t>architecture  </a:t>
             </a:r>
+            <a:endParaRPr lang="en-US" sz="2000" dirty="0"/>
           </a:p>
           <a:p>
             <a:pPr marL="0" indent="0">
@@ -7176,48 +7122,53 @@
               <a:buNone/>
             </a:pPr>
             <a:r>
-              <a:rPr lang="en-US" sz="2000" dirty="0" smtClean="0">
-                <a:highlight>
-                  <a:srgbClr val="FFFF00"/>
-                </a:highlight>
-                <a:cs typeface="Arial"/>
-              </a:rPr>
+              <a:rPr lang="en-US" sz="2000" dirty="0"/>
               <a:t>v1.2.1 Integrate systems                 v1.2.2 Test HIPAA compliance  </a:t>
             </a:r>
+            <a:endParaRPr lang="en-US" sz="2000" dirty="0" smtClean="0"/>
           </a:p>
           <a:p>
             <a:pPr marL="0" indent="0">
               <a:buNone/>
             </a:pPr>
-            <a:r>
-              <a:rPr lang="en-US" sz="2000" dirty="0" smtClean="0">
-                <a:highlight>
-                  <a:srgbClr val="FFFF00"/>
-                </a:highlight>
-                <a:cs typeface="Arial"/>
-              </a:rPr>
-              <a:t>v1.3.1 Deploy system        v1.3.2 Train stakeholders                                                          v1.3.3 Conduct lessons learned    </a:t>
-            </a:r>
+            <a:endParaRPr lang="en-US" sz="2000" dirty="0"/>
           </a:p>
           <a:p>
             <a:pPr marL="0" indent="0">
               <a:buNone/>
             </a:pPr>
             <a:r>
-              <a:rPr lang="en-US" sz="2000" dirty="0" err="1" smtClean="0">
-                <a:highlight>
-                  <a:srgbClr val="FFFF00"/>
-                </a:highlight>
-                <a:cs typeface="Arial"/>
-              </a:rPr>
+              <a:rPr lang="en-US" sz="2000" dirty="0"/>
+              <a:t>v1.3.1 Deploy system        </a:t>
+            </a:r>
+          </a:p>
+          <a:p>
+            <a:pPr marL="0" indent="0">
+              <a:buNone/>
+            </a:pPr>
+            <a:r>
+              <a:rPr lang="en-US" sz="2000" dirty="0"/>
+              <a:t>v1.3.2 Train stakeholders     </a:t>
+            </a:r>
+          </a:p>
+          <a:p>
+            <a:pPr marL="0" indent="0">
+              <a:buNone/>
+            </a:pPr>
+            <a:r>
+              <a:rPr lang="en-US" sz="2000" dirty="0"/>
+              <a:t>v1.3.3 Conduct lessons learned    </a:t>
+            </a:r>
+          </a:p>
+          <a:p>
+            <a:pPr marL="0" indent="0">
+              <a:buNone/>
+            </a:pPr>
+            <a:r>
+              <a:rPr lang="en-US" sz="2000" dirty="0" err="1"/>
               <a:t>vEnd</a:t>
             </a:r>
-            <a:endParaRPr lang="en-US" sz="2000" dirty="0">
-              <a:highlight>
-                <a:srgbClr val="FFFF00"/>
-              </a:highlight>
-              <a:cs typeface="Arial"/>
-            </a:endParaRPr>
+            <a:endParaRPr lang="en-US" sz="2000" dirty="0"/>
           </a:p>
         </p:txBody>
       </p:sp>
@@ -7229,7 +7180,7 @@
         </p:nvCxnSpPr>
         <p:spPr>
           <a:xfrm>
-            <a:off x="1284231" y="2212322"/>
+            <a:off x="1275765" y="2161522"/>
             <a:ext cx="301557" cy="0"/>
           </a:xfrm>
           <a:prstGeom prst="straightConnector1">
@@ -7262,7 +7213,7 @@
         </p:nvCxnSpPr>
         <p:spPr>
           <a:xfrm>
-            <a:off x="6381164" y="2305455"/>
+            <a:off x="4847166" y="2158550"/>
             <a:ext cx="468369" cy="5944"/>
           </a:xfrm>
           <a:prstGeom prst="straightConnector1">
@@ -7295,8 +7246,8 @@
         </p:nvCxnSpPr>
         <p:spPr>
           <a:xfrm flipH="1">
-            <a:off x="2133599" y="2407491"/>
-            <a:ext cx="5427134" cy="448733"/>
+            <a:off x="1998133" y="2407491"/>
+            <a:ext cx="5562600" cy="278459"/>
           </a:xfrm>
           <a:prstGeom prst="straightConnector1">
             <a:avLst/>
@@ -7328,7 +7279,7 @@
         </p:nvCxnSpPr>
         <p:spPr>
           <a:xfrm>
-            <a:off x="3859449" y="2986184"/>
+            <a:off x="3777663" y="2917306"/>
             <a:ext cx="468369" cy="5944"/>
           </a:xfrm>
           <a:prstGeom prst="straightConnector1">
@@ -7355,46 +7306,13 @@
       </p:cxnSp>
       <p:cxnSp>
         <p:nvCxnSpPr>
-          <p:cNvPr id="15" name="Straight Arrow Connector 14"/>
+          <p:cNvPr id="11" name="Straight Arrow Connector 10"/>
           <p:cNvCxnSpPr/>
           <p:nvPr/>
         </p:nvCxnSpPr>
         <p:spPr>
           <a:xfrm>
-            <a:off x="3777664" y="4270829"/>
-            <a:ext cx="468369" cy="5944"/>
-          </a:xfrm>
-          <a:prstGeom prst="straightConnector1">
-            <a:avLst/>
-          </a:prstGeom>
-          <a:ln>
-            <a:tailEnd type="triangle"/>
-          </a:ln>
-        </p:spPr>
-        <p:style>
-          <a:lnRef idx="2">
-            <a:schemeClr val="accent1"/>
-          </a:lnRef>
-          <a:fillRef idx="0">
-            <a:schemeClr val="accent1"/>
-          </a:fillRef>
-          <a:effectRef idx="1">
-            <a:schemeClr val="accent1"/>
-          </a:effectRef>
-          <a:fontRef idx="minor">
-            <a:schemeClr val="tx1"/>
-          </a:fontRef>
-        </p:style>
-      </p:cxnSp>
-      <p:cxnSp>
-        <p:nvCxnSpPr>
-          <p:cNvPr id="16" name="Straight Arrow Connector 15"/>
-          <p:cNvCxnSpPr/>
-          <p:nvPr/>
-        </p:nvCxnSpPr>
-        <p:spPr>
-          <a:xfrm>
-            <a:off x="4011849" y="3138584"/>
+            <a:off x="3777663" y="3660994"/>
             <a:ext cx="468369" cy="5944"/>
           </a:xfrm>
           <a:prstGeom prst="straightConnector1">
@@ -14630,38 +14548,16 @@
               <a:buNone/>
             </a:pPr>
             <a:r>
-              <a:rPr lang="en-US" sz="1600" b="1" dirty="0">
-                <a:highlight>
-                  <a:srgbClr val="FFFF00"/>
-                </a:highlight>
-                <a:cs typeface="Arial"/>
-              </a:rPr>
-              <a:t>[Outline the problem, key insights, and recommended actions in 6 bullet points.]</a:t>
-            </a:r>
-          </a:p>
-          <a:p>
-            <a:pPr marL="0" indent="0">
-              <a:spcBef>
-                <a:spcPts val="600"/>
-              </a:spcBef>
-              <a:buNone/>
-            </a:pPr>
-            <a:endParaRPr lang="en-US" sz="1600" b="1" dirty="0">
-              <a:cs typeface="Arial" panose="020B0604020202020204" pitchFamily="34" charset="0"/>
-            </a:endParaRPr>
-          </a:p>
-          <a:p>
-            <a:pPr marL="0" indent="0">
-              <a:spcBef>
-                <a:spcPts val="600"/>
-              </a:spcBef>
-              <a:buNone/>
-            </a:pPr>
-            <a:r>
-              <a:rPr lang="en-US" sz="1600" b="1" dirty="0">
+              <a:rPr lang="en-US" sz="2400" b="1" dirty="0" smtClean="0">
                 <a:cs typeface="Arial" panose="020B0604020202020204" pitchFamily="34" charset="0"/>
               </a:rPr>
-              <a:t>Problem:</a:t>
+              <a:t>Problem</a:t>
+            </a:r>
+            <a:r>
+              <a:rPr lang="en-US" sz="2400" b="1" dirty="0">
+                <a:cs typeface="Arial" panose="020B0604020202020204" pitchFamily="34" charset="0"/>
+              </a:rPr>
+              <a:t>:</a:t>
             </a:r>
           </a:p>
           <a:p>
@@ -14673,7 +14569,7 @@
               <a:buAutoNum type="arabicPeriod"/>
             </a:pPr>
             <a:r>
-              <a:rPr lang="en-US" sz="1600" dirty="0">
+              <a:rPr lang="en-US" sz="2400" dirty="0">
                 <a:cs typeface="Arial" panose="020B0604020202020204" pitchFamily="34" charset="0"/>
               </a:rPr>
               <a:t> </a:t>
@@ -14685,7 +14581,7 @@
                 <a:spcPts val="600"/>
               </a:spcBef>
             </a:pPr>
-            <a:endParaRPr lang="en-US" sz="1600" dirty="0">
+            <a:endParaRPr lang="en-US" sz="2400" dirty="0">
               <a:cs typeface="Arial" panose="020B0604020202020204" pitchFamily="34" charset="0"/>
             </a:endParaRPr>
           </a:p>
@@ -14695,7 +14591,7 @@
                 <a:spcPts val="600"/>
               </a:spcBef>
             </a:pPr>
-            <a:endParaRPr lang="en-US" sz="1600" dirty="0">
+            <a:endParaRPr lang="en-US" sz="2400" dirty="0">
               <a:cs typeface="Arial" panose="020B0604020202020204" pitchFamily="34" charset="0"/>
             </a:endParaRPr>
           </a:p>
@@ -14707,7 +14603,7 @@
               <a:buNone/>
             </a:pPr>
             <a:r>
-              <a:rPr lang="en-US" sz="1600" b="1" dirty="0">
+              <a:rPr lang="en-US" sz="2400" b="1" dirty="0">
                 <a:cs typeface="Arial" panose="020B0604020202020204" pitchFamily="34" charset="0"/>
               </a:rPr>
               <a:t>Key insights:</a:t>
@@ -14722,7 +14618,7 @@
               <a:buAutoNum type="arabicPeriod"/>
             </a:pPr>
             <a:r>
-              <a:rPr lang="en-US" sz="1600" dirty="0">
+              <a:rPr lang="en-US" sz="2400" dirty="0">
                 <a:cs typeface="Arial" panose="020B0604020202020204" pitchFamily="34" charset="0"/>
               </a:rPr>
               <a:t> </a:t>
@@ -14737,7 +14633,7 @@
               <a:buAutoNum type="arabicPeriod"/>
             </a:pPr>
             <a:r>
-              <a:rPr lang="en-US" sz="1600" dirty="0">
+              <a:rPr lang="en-US" sz="2400" dirty="0">
                 <a:cs typeface="Arial" panose="020B0604020202020204" pitchFamily="34" charset="0"/>
               </a:rPr>
               <a:t> </a:t>
@@ -14749,7 +14645,7 @@
                 <a:spcPts val="600"/>
               </a:spcBef>
             </a:pPr>
-            <a:endParaRPr lang="en-US" sz="1600" dirty="0">
+            <a:endParaRPr lang="en-US" sz="2400" dirty="0">
               <a:cs typeface="Arial" panose="020B0604020202020204" pitchFamily="34" charset="0"/>
             </a:endParaRPr>
           </a:p>
@@ -14761,7 +14657,7 @@
               <a:buNone/>
             </a:pPr>
             <a:r>
-              <a:rPr lang="en-US" sz="1600" b="1" dirty="0">
+              <a:rPr lang="en-US" sz="2400" b="1" dirty="0">
                 <a:cs typeface="Arial" panose="020B0604020202020204" pitchFamily="34" charset="0"/>
               </a:rPr>
               <a:t>Recommended actions:</a:t>
@@ -14776,7 +14672,7 @@
               <a:buAutoNum type="arabicPeriod"/>
             </a:pPr>
             <a:r>
-              <a:rPr lang="en-US" sz="1600" dirty="0">
+              <a:rPr lang="en-US" sz="2400" dirty="0">
                 <a:cs typeface="Arial" panose="020B0604020202020204" pitchFamily="34" charset="0"/>
               </a:rPr>
               <a:t> </a:t>
@@ -14791,7 +14687,7 @@
               <a:buAutoNum type="arabicPeriod"/>
             </a:pPr>
             <a:r>
-              <a:rPr lang="en-US" sz="1600" dirty="0">
+              <a:rPr lang="en-US" sz="2400" dirty="0">
                 <a:cs typeface="Arial" panose="020B0604020202020204" pitchFamily="34" charset="0"/>
               </a:rPr>
               <a:t> </a:t>
@@ -14806,12 +14702,12 @@
               <a:buAutoNum type="arabicPeriod"/>
             </a:pPr>
             <a:r>
-              <a:rPr lang="en-US" sz="1600" dirty="0">
+              <a:rPr lang="en-US" sz="2400" dirty="0">
                 <a:cs typeface="Arial" panose="020B0604020202020204" pitchFamily="34" charset="0"/>
               </a:rPr>
               <a:t> </a:t>
             </a:r>
-            <a:endParaRPr lang="en-IN" sz="1600" dirty="0"/>
+            <a:endParaRPr lang="en-IN" sz="2400" dirty="0"/>
           </a:p>
         </p:txBody>
       </p:sp>
@@ -16387,6 +16283,13 @@
   <p:clrMapOvr>
     <a:masterClrMapping/>
   </p:clrMapOvr>
+  <p:timing>
+    <p:tnLst>
+      <p:par>
+        <p:cTn id="1" dur="indefinite" restart="never" nodeType="tmRoot"/>
+      </p:par>
+    </p:tnLst>
+  </p:timing>
 </p:sld>
 </file>
 
@@ -16687,6 +16590,13 @@
   <p:clrMapOvr>
     <a:masterClrMapping/>
   </p:clrMapOvr>
+  <p:timing>
+    <p:tnLst>
+      <p:par>
+        <p:cTn id="1" dur="indefinite" restart="never" nodeType="tmRoot"/>
+      </p:par>
+    </p:tnLst>
+  </p:timing>
 </p:sld>
 </file>
 
@@ -18116,43 +18026,54 @@
               <a:buNone/>
             </a:pPr>
             <a:r>
-              <a:rPr lang="en-US" sz="1600" b="1" dirty="0">
-                <a:highlight>
-                  <a:srgbClr val="FFFF00"/>
-                </a:highlight>
-                <a:cs typeface="Arial"/>
+              <a:rPr lang="en-US" sz="2400" b="1" dirty="0" smtClean="0">
+                <a:cs typeface="Arial" panose="020B0604020202020204" pitchFamily="34" charset="0"/>
               </a:rPr>
-              <a:t>[Summarize the opportunity, describe the approach, and outline the key questions or hypotheses to be analyzed in 6 bullet points.]</a:t>
+              <a:t>Opportunity</a:t>
+            </a:r>
+            <a:r>
+              <a:rPr lang="en-US" sz="2400" b="1" dirty="0">
+                <a:cs typeface="Arial" panose="020B0604020202020204" pitchFamily="34" charset="0"/>
+              </a:rPr>
+              <a:t>:</a:t>
             </a:r>
           </a:p>
           <a:p>
             <a:pPr marL="0" indent="0">
               <a:buNone/>
             </a:pPr>
-            <a:endParaRPr lang="en-US" sz="1600" b="1" dirty="0">
-              <a:cs typeface="Arial" panose="020B0604020202020204" pitchFamily="34" charset="0"/>
-            </a:endParaRPr>
+            <a:r>
+              <a:rPr lang="en-US" sz="2400" b="1" dirty="0">
+                <a:cs typeface="Arial" panose="020B0604020202020204" pitchFamily="34" charset="0"/>
+              </a:rPr>
+              <a:t>1. </a:t>
+            </a:r>
           </a:p>
           <a:p>
             <a:pPr marL="0" indent="0">
               <a:buNone/>
             </a:pPr>
             <a:r>
-              <a:rPr lang="en-US" sz="1600" b="1" dirty="0">
+              <a:rPr lang="en-US" sz="2400" b="1" dirty="0">
                 <a:cs typeface="Arial" panose="020B0604020202020204" pitchFamily="34" charset="0"/>
               </a:rPr>
-              <a:t>Opportunity:</a:t>
-            </a:r>
+              <a:t>2.</a:t>
+            </a:r>
+          </a:p>
+          <a:p>
+            <a:endParaRPr lang="en-US" sz="2400" b="1" dirty="0">
+              <a:cs typeface="Arial" panose="020B0604020202020204" pitchFamily="34" charset="0"/>
+            </a:endParaRPr>
           </a:p>
           <a:p>
             <a:pPr marL="0" indent="0">
               <a:buNone/>
             </a:pPr>
             <a:r>
-              <a:rPr lang="en-US" sz="1600" b="1" dirty="0">
+              <a:rPr lang="en-US" sz="2400" b="1" dirty="0">
                 <a:cs typeface="Arial" panose="020B0604020202020204" pitchFamily="34" charset="0"/>
               </a:rPr>
-              <a:t>1. </a:t>
+              <a:t>Approach:</a:t>
             </a:r>
           </a:p>
           <a:p>
@@ -18160,14 +18081,25 @@
               <a:buNone/>
             </a:pPr>
             <a:r>
-              <a:rPr lang="en-US" sz="1600" b="1" dirty="0">
+              <a:rPr lang="en-US" sz="2400" b="1" dirty="0">
+                <a:cs typeface="Arial" panose="020B0604020202020204" pitchFamily="34" charset="0"/>
+              </a:rPr>
+              <a:t>1.</a:t>
+            </a:r>
+          </a:p>
+          <a:p>
+            <a:pPr marL="0" indent="0">
+              <a:buNone/>
+            </a:pPr>
+            <a:r>
+              <a:rPr lang="en-US" sz="2400" b="1" dirty="0">
                 <a:cs typeface="Arial" panose="020B0604020202020204" pitchFamily="34" charset="0"/>
               </a:rPr>
               <a:t>2.</a:t>
             </a:r>
           </a:p>
           <a:p>
-            <a:endParaRPr lang="en-US" sz="1600" b="1" dirty="0">
+            <a:endParaRPr lang="en-US" sz="2400" b="1" dirty="0">
               <a:cs typeface="Arial" panose="020B0604020202020204" pitchFamily="34" charset="0"/>
             </a:endParaRPr>
           </a:p>
@@ -18176,10 +18108,10 @@
               <a:buNone/>
             </a:pPr>
             <a:r>
-              <a:rPr lang="en-US" sz="1600" b="1" dirty="0">
+              <a:rPr lang="en-US" sz="2400" b="1" dirty="0">
                 <a:cs typeface="Arial" panose="020B0604020202020204" pitchFamily="34" charset="0"/>
               </a:rPr>
-              <a:t>Approach:</a:t>
+              <a:t>Key questions/hypotheses:</a:t>
             </a:r>
           </a:p>
           <a:p>
@@ -18187,7 +18119,7 @@
               <a:buNone/>
             </a:pPr>
             <a:r>
-              <a:rPr lang="en-US" sz="1600" b="1" dirty="0">
+              <a:rPr lang="en-US" sz="2400" b="1" dirty="0">
                 <a:cs typeface="Arial" panose="020B0604020202020204" pitchFamily="34" charset="0"/>
               </a:rPr>
               <a:t>1.</a:t>
@@ -18198,45 +18130,7 @@
               <a:buNone/>
             </a:pPr>
             <a:r>
-              <a:rPr lang="en-US" sz="1600" b="1" dirty="0">
-                <a:cs typeface="Arial" panose="020B0604020202020204" pitchFamily="34" charset="0"/>
-              </a:rPr>
-              <a:t>2.</a:t>
-            </a:r>
-          </a:p>
-          <a:p>
-            <a:endParaRPr lang="en-US" sz="1600" b="1" dirty="0">
-              <a:cs typeface="Arial" panose="020B0604020202020204" pitchFamily="34" charset="0"/>
-            </a:endParaRPr>
-          </a:p>
-          <a:p>
-            <a:pPr marL="0" indent="0">
-              <a:buNone/>
-            </a:pPr>
-            <a:r>
-              <a:rPr lang="en-US" sz="1600" b="1" dirty="0">
-                <a:cs typeface="Arial" panose="020B0604020202020204" pitchFamily="34" charset="0"/>
-              </a:rPr>
-              <a:t>Key questions/hypotheses:</a:t>
-            </a:r>
-          </a:p>
-          <a:p>
-            <a:pPr marL="0" indent="0">
-              <a:buNone/>
-            </a:pPr>
-            <a:r>
-              <a:rPr lang="en-US" sz="1600" b="1" dirty="0">
-                <a:cs typeface="Arial" panose="020B0604020202020204" pitchFamily="34" charset="0"/>
-              </a:rPr>
-              <a:t>1.</a:t>
-            </a:r>
-          </a:p>
-          <a:p>
-            <a:pPr marL="0" indent="0">
-              <a:buNone/>
-            </a:pPr>
-            <a:r>
-              <a:rPr lang="en-US" sz="1600" b="1" dirty="0">
+              <a:rPr lang="en-US" sz="2400" b="1" dirty="0">
                 <a:cs typeface="Arial" panose="020B0604020202020204" pitchFamily="34" charset="0"/>
               </a:rPr>
               <a:t>2.</a:t>
@@ -19862,7 +19756,89 @@
               <a:buFont typeface="Arial" panose="020B0604020202020204" pitchFamily="34" charset="0"/>
               <a:buNone/>
             </a:pPr>
-            <a:endParaRPr lang="en-US" sz="2400" b="1" dirty="0"/>
+            <a:endParaRPr lang="en-US" sz="2400" b="1" dirty="0" smtClean="0"/>
+          </a:p>
+          <a:p>
+            <a:pPr marL="0" indent="0">
+              <a:buNone/>
+            </a:pPr>
+            <a:r>
+              <a:rPr lang="en-MY" sz="2400" b="1" dirty="0"/>
+              <a:t>Critical Gaps Identified</a:t>
+            </a:r>
+            <a:r>
+              <a:rPr lang="en-MY" sz="2400" b="1" dirty="0" smtClean="0"/>
+              <a:t>:</a:t>
+            </a:r>
+          </a:p>
+          <a:p>
+            <a:pPr marL="0" indent="0">
+              <a:buNone/>
+            </a:pPr>
+            <a:endParaRPr lang="en-MY" sz="2400" b="1" dirty="0"/>
+          </a:p>
+          <a:p>
+            <a:pPr>
+              <a:buFont typeface="+mj-lt"/>
+              <a:buAutoNum type="arabicPeriod"/>
+            </a:pPr>
+            <a:r>
+              <a:rPr lang="en-MY" sz="2400" b="1" dirty="0"/>
+              <a:t>HIPAA Compliance</a:t>
+            </a:r>
+            <a:r>
+              <a:rPr lang="en-MY" sz="2400" dirty="0"/>
+              <a:t>: Original plan had no explicit healthcare compliance testing</a:t>
+            </a:r>
+          </a:p>
+          <a:p>
+            <a:pPr>
+              <a:buFont typeface="+mj-lt"/>
+              <a:buAutoNum type="arabicPeriod"/>
+            </a:pPr>
+            <a:r>
+              <a:rPr lang="en-MY" sz="2400" b="1" dirty="0"/>
+              <a:t>Security Vulnerabilities</a:t>
+            </a:r>
+            <a:r>
+              <a:rPr lang="en-MY" sz="2400" dirty="0"/>
+              <a:t>: Missing session timeout and data protection validation</a:t>
+            </a:r>
+          </a:p>
+          <a:p>
+            <a:pPr>
+              <a:buFont typeface="+mj-lt"/>
+              <a:buAutoNum type="arabicPeriod"/>
+            </a:pPr>
+            <a:r>
+              <a:rPr lang="en-MY" sz="2400" b="1" dirty="0"/>
+              <a:t>Business Logic</a:t>
+            </a:r>
+            <a:r>
+              <a:rPr lang="en-MY" sz="2400" dirty="0"/>
+              <a:t>: No duplicate booking prevention testing</a:t>
+            </a:r>
+          </a:p>
+          <a:p>
+            <a:pPr>
+              <a:buFont typeface="+mj-lt"/>
+              <a:buAutoNum type="arabicPeriod"/>
+            </a:pPr>
+            <a:r>
+              <a:rPr lang="en-MY" sz="2400" b="1" dirty="0"/>
+              <a:t>Information Disclosure</a:t>
+            </a:r>
+            <a:r>
+              <a:rPr lang="en-MY" sz="2400" dirty="0"/>
+              <a:t>: Original error messages could leak sensitive data</a:t>
+            </a:r>
+          </a:p>
+          <a:p>
+            <a:pPr marL="0" indent="0">
+              <a:buFont typeface="Arial" panose="020B0604020202020204" pitchFamily="34" charset="0"/>
+              <a:buNone/>
+            </a:pPr>
+            <a:endParaRPr lang="en-US" sz="2400" b="1" dirty="0" smtClean="0"/>
           </a:p>
           <a:p>
             <a:pPr marL="0" indent="0">
@@ -19927,8 +19903,8 @@
         </p:nvSpPr>
         <p:spPr>
           <a:xfrm>
-            <a:off x="572756" y="133943"/>
-            <a:ext cx="9813446" cy="850726"/>
+            <a:off x="572756" y="133942"/>
+            <a:ext cx="9813446" cy="1237657"/>
           </a:xfrm>
         </p:spPr>
         <p:txBody>
@@ -19938,9 +19914,13 @@
           <a:lstStyle/>
           <a:p>
             <a:r>
-              <a:rPr lang="en-US" sz="3200" dirty="0"/>
+              <a:rPr lang="en-US" sz="3200" smtClean="0"/>
               <a:t>Test Planning and Case Design Using TDD and BDD</a:t>
             </a:r>
+            <a:br>
+              <a:rPr lang="en-US" sz="3200" smtClean="0"/>
+            </a:br>
+            <a:endParaRPr lang="en-US" sz="3200" dirty="0"/>
           </a:p>
         </p:txBody>
       </p:sp>
@@ -20160,16 +20140,128 @@
               <a:buNone/>
             </a:pPr>
             <a:r>
+              <a:rPr lang="en-US" sz="1800" b="1" dirty="0"/>
+              <a:t>Test Objective: Booking Restriction Logic </a:t>
+            </a:r>
+            <a:r>
+              <a:rPr lang="en-US" sz="1800" b="1" dirty="0" smtClean="0"/>
+              <a:t>Validation</a:t>
+            </a:r>
+          </a:p>
+          <a:p>
+            <a:pPr marL="0" indent="0">
+              <a:buNone/>
+            </a:pPr>
+            <a:r>
+              <a:rPr lang="en-US" sz="1600" dirty="0"/>
+              <a:t>Test Name: </a:t>
+            </a:r>
+            <a:r>
+              <a:rPr lang="en-US" sz="1600" dirty="0" err="1"/>
+              <a:t>testBookingRestrictionAfterThreeFailedAttempts</a:t>
+            </a:r>
+            <a:r>
+              <a:rPr lang="en-US" sz="1600" dirty="0"/>
+              <a:t>()</a:t>
+            </a:r>
+          </a:p>
+          <a:p>
+            <a:pPr marL="0" indent="0">
+              <a:buNone/>
+            </a:pPr>
+            <a:r>
+              <a:rPr lang="en-US" sz="1600" dirty="0"/>
+              <a:t>Objective: </a:t>
+            </a:r>
+            <a:endParaRPr lang="en-US" sz="1600" dirty="0" smtClean="0"/>
+          </a:p>
+          <a:p>
+            <a:pPr marL="0" indent="0">
+              <a:buNone/>
+            </a:pPr>
+            <a:r>
+              <a:rPr lang="en-US" sz="1600" dirty="0" smtClean="0"/>
+              <a:t>Verify </a:t>
+            </a:r>
+            <a:r>
+              <a:rPr lang="en-US" sz="1600" dirty="0"/>
+              <a:t>that the appointment booking system correctly implements the three-strike restriction mechanism by:</a:t>
+            </a:r>
+          </a:p>
+          <a:p>
+            <a:pPr marL="0" indent="0">
+              <a:buNone/>
+            </a:pPr>
+            <a:endParaRPr lang="en-US" sz="1800" dirty="0">
+              <a:highlight>
+                <a:srgbClr val="FFFF00"/>
+              </a:highlight>
+              <a:cs typeface="Arial"/>
+            </a:endParaRPr>
+          </a:p>
+          <a:p>
+            <a:pPr marL="0" indent="0">
+              <a:buNone/>
+            </a:pPr>
+            <a:r>
+              <a:rPr lang="en-US" sz="1800" b="1" dirty="0"/>
+              <a:t>Scenario 1: Successful Appointment </a:t>
+            </a:r>
+            <a:r>
+              <a:rPr lang="en-US" sz="1800" b="1" dirty="0" smtClean="0"/>
+              <a:t>Booking</a:t>
+            </a:r>
+          </a:p>
+          <a:p>
+            <a:pPr marL="0" indent="0">
+              <a:buNone/>
+            </a:pPr>
+            <a:endParaRPr lang="en-US" sz="1800" dirty="0">
+              <a:highlight>
+                <a:srgbClr val="FFFF00"/>
+              </a:highlight>
+              <a:cs typeface="Arial"/>
+            </a:endParaRPr>
+          </a:p>
+          <a:p>
+            <a:pPr marL="0" indent="0">
+              <a:buNone/>
+            </a:pPr>
+            <a:r>
               <a:rPr lang="en-US" sz="1800" dirty="0">
-                <a:highlight>
-                  <a:srgbClr val="FFFF00"/>
-                </a:highlight>
-                <a:ea typeface="+mn-lt"/>
-                <a:cs typeface="+mn-lt"/>
+                <a:solidFill>
+                  <a:srgbClr val="A626A4"/>
+                </a:solidFill>
               </a:rPr>
-              <a:t>[Provide examples linking requirements to test cases in TDD/BDD format.]</a:t>
-            </a:r>
-            <a:endParaRPr lang="en-US" sz="1800" dirty="0">
+              <a:t>Feature:</a:t>
+            </a:r>
+            <a:r>
+              <a:rPr lang="en-US" sz="1800" dirty="0">
+                <a:solidFill>
+                  <a:srgbClr val="E45649"/>
+                </a:solidFill>
+              </a:rPr>
+              <a:t> Patient Appointment Booking</a:t>
+            </a:r>
+            <a:r>
+              <a:rPr lang="en-US" sz="1800" dirty="0"/>
+              <a:t> </a:t>
+            </a:r>
+            <a:endParaRPr lang="en-US" sz="1800" dirty="0" smtClean="0"/>
+          </a:p>
+          <a:p>
+            <a:pPr marL="0" indent="0">
+              <a:buNone/>
+            </a:pPr>
+            <a:r>
+              <a:rPr lang="en-US" sz="1800" dirty="0" smtClean="0"/>
+              <a:t>As </a:t>
+            </a:r>
+            <a:r>
+              <a:rPr lang="en-US" sz="1800" dirty="0"/>
+              <a:t>a registered patient I want to book medical appointments online So that I can schedule healthcare visits conveniently</a:t>
+            </a:r>
+            <a:endParaRPr lang="en-US" sz="1800" dirty="0" smtClean="0">
               <a:highlight>
                 <a:srgbClr val="FFFF00"/>
               </a:highlight>
@@ -20188,6 +20280,13 @@
   <p:clrMapOvr>
     <a:masterClrMapping/>
   </p:clrMapOvr>
+  <p:timing>
+    <p:tnLst>
+      <p:par>
+        <p:cTn id="1" dur="indefinite" restart="never" nodeType="tmRoot"/>
+      </p:par>
+    </p:tnLst>
+  </p:timing>
 </p:sld>
 </file>
 
@@ -20265,8 +20364,8 @@
         </p:nvSpPr>
         <p:spPr>
           <a:xfrm>
-            <a:off x="573087" y="1216025"/>
-            <a:ext cx="10659485" cy="4503738"/>
+            <a:off x="573087" y="1138136"/>
+            <a:ext cx="10659485" cy="4581627"/>
           </a:xfrm>
           <a:prstGeom prst="rect">
             <a:avLst/>
@@ -20274,7 +20373,7 @@
         </p:spPr>
         <p:txBody>
           <a:bodyPr vert="horz" lIns="91440" tIns="45720" rIns="91440" bIns="45720" rtlCol="0" anchor="t">
-            <a:normAutofit/>
+            <a:normAutofit fontScale="25000" lnSpcReduction="20000"/>
           </a:bodyPr>
           <a:lstStyle>
             <a:lvl1pPr marL="228600" indent="-228600" algn="l" defTabSz="914400" rtl="0" eaLnBrk="1" latinLnBrk="0" hangingPunct="1">
@@ -20451,36 +20550,278 @@
             </a:lvl9pPr>
           </a:lstStyle>
           <a:p>
+            <a:r>
+              <a:rPr lang="en-MY" sz="5600" dirty="0" smtClean="0"/>
+              <a:t>| </a:t>
+            </a:r>
+            <a:r>
+              <a:rPr lang="en-MY" sz="5600" b="1" dirty="0"/>
+              <a:t>**Stage**</a:t>
+            </a:r>
+            <a:r>
+              <a:rPr lang="en-MY" sz="5600" dirty="0"/>
+              <a:t> | </a:t>
+            </a:r>
+            <a:r>
+              <a:rPr lang="en-MY" sz="5600" b="1" dirty="0"/>
+              <a:t>**Type**</a:t>
+            </a:r>
+            <a:r>
+              <a:rPr lang="en-MY" sz="5600" dirty="0"/>
+              <a:t> | </a:t>
+            </a:r>
+            <a:r>
+              <a:rPr lang="en-MY" sz="5600" b="1" dirty="0"/>
+              <a:t>**Activities**</a:t>
+            </a:r>
+            <a:r>
+              <a:rPr lang="en-MY" sz="5600" dirty="0"/>
+              <a:t> | </a:t>
+            </a:r>
+            <a:r>
+              <a:rPr lang="en-MY" sz="5600" b="1" dirty="0"/>
+              <a:t>**Expected Outputs**</a:t>
+            </a:r>
+            <a:r>
+              <a:rPr lang="en-MY" sz="5600" dirty="0"/>
+              <a:t> | </a:t>
+            </a:r>
+            <a:r>
+              <a:rPr lang="en-MY" sz="5600" b="1" dirty="0"/>
+              <a:t>**Duration**</a:t>
+            </a:r>
+            <a:r>
+              <a:rPr lang="en-MY" sz="5600" dirty="0"/>
+              <a:t> |</a:t>
+            </a:r>
+          </a:p>
+          <a:p>
+            <a:r>
+              <a:rPr lang="en-MY" sz="5600" dirty="0"/>
+              <a:t>|-----------|----------|----------------|---------------------|--------------|</a:t>
+            </a:r>
+          </a:p>
+          <a:p>
+            <a:r>
+              <a:rPr lang="en-MY" sz="5600" dirty="0"/>
+              <a:t>| </a:t>
+            </a:r>
+            <a:r>
+              <a:rPr lang="en-MY" sz="5600" b="1" dirty="0"/>
+              <a:t>**1. Source Control**</a:t>
+            </a:r>
+            <a:r>
+              <a:rPr lang="en-MY" sz="5600" dirty="0"/>
+              <a:t> | Automated | Git commit triggers, branch protection rules, PR validation | Commit hash, branch status, PR approval | 2-5 min |</a:t>
+            </a:r>
+          </a:p>
+          <a:p>
+            <a:r>
+              <a:rPr lang="en-MY" sz="5600" dirty="0"/>
+              <a:t>| </a:t>
+            </a:r>
+            <a:r>
+              <a:rPr lang="en-MY" sz="5600" b="1" dirty="0"/>
+              <a:t>**2. Build &amp; Compile**</a:t>
+            </a:r>
+            <a:r>
+              <a:rPr lang="en-MY" sz="5600" dirty="0"/>
+              <a:t> | Automated | Code compilation, dependency resolution, </a:t>
+            </a:r>
+            <a:r>
+              <a:rPr lang="en-MY" sz="5600" dirty="0" err="1"/>
+              <a:t>artifact</a:t>
+            </a:r>
+            <a:r>
+              <a:rPr lang="en-MY" sz="5600" dirty="0"/>
+              <a:t> creation | Build </a:t>
+            </a:r>
+            <a:r>
+              <a:rPr lang="en-MY" sz="5600" dirty="0" err="1"/>
+              <a:t>artifacts</a:t>
+            </a:r>
+            <a:r>
+              <a:rPr lang="en-MY" sz="5600" dirty="0"/>
+              <a:t>, dependency report, build logs | 5-10 min |</a:t>
+            </a:r>
+          </a:p>
+          <a:p>
+            <a:r>
+              <a:rPr lang="en-MY" sz="5600" dirty="0"/>
+              <a:t>| </a:t>
+            </a:r>
+            <a:r>
+              <a:rPr lang="en-MY" sz="5600" b="1" dirty="0"/>
+              <a:t>**3. Static Analysis**</a:t>
+            </a:r>
+            <a:r>
+              <a:rPr lang="en-MY" sz="5600" dirty="0"/>
+              <a:t> | Automated | Code quality checks, security scanning, HIPAA compliance validation | </a:t>
+            </a:r>
+            <a:r>
+              <a:rPr lang="en-MY" sz="5600" dirty="0" err="1"/>
+              <a:t>SonarQube</a:t>
+            </a:r>
+            <a:r>
+              <a:rPr lang="en-MY" sz="5600" dirty="0"/>
+              <a:t> report, security scan results, compliance checklist | 3-7 min |</a:t>
+            </a:r>
+          </a:p>
+          <a:p>
+            <a:r>
+              <a:rPr lang="en-MY" sz="5600" dirty="0"/>
+              <a:t>| </a:t>
+            </a:r>
+            <a:r>
+              <a:rPr lang="en-MY" sz="5600" b="1" dirty="0"/>
+              <a:t>**4. Unit Testing**</a:t>
+            </a:r>
+            <a:r>
+              <a:rPr lang="en-MY" sz="5600" dirty="0"/>
+              <a:t> | Automated | TDD test execution, code coverage analysis, mock data validation | Test results, coverage report, performance metrics | 8-15 min |</a:t>
+            </a:r>
+          </a:p>
+          <a:p>
+            <a:r>
+              <a:rPr lang="en-MY" sz="5600" dirty="0"/>
+              <a:t>| </a:t>
+            </a:r>
+            <a:r>
+              <a:rPr lang="en-MY" sz="5600" b="1" dirty="0"/>
+              <a:t>**5. Integration Testing**</a:t>
+            </a:r>
+            <a:r>
+              <a:rPr lang="en-MY" sz="5600" dirty="0"/>
+              <a:t> | Automated | API testing, database integration, third-party service validation | Integration test results, API response logs, DB connection status | 10-20 min |</a:t>
+            </a:r>
+          </a:p>
+          <a:p>
+            <a:r>
+              <a:rPr lang="en-MY" sz="5600" dirty="0"/>
+              <a:t>| </a:t>
+            </a:r>
+            <a:r>
+              <a:rPr lang="en-MY" sz="5600" b="1" dirty="0"/>
+              <a:t>**6. Security Testing**</a:t>
+            </a:r>
+            <a:r>
+              <a:rPr lang="en-MY" sz="5600" dirty="0"/>
+              <a:t> | Automated | Vulnerability scanning, penetration testing, encryption validation | Security report, vulnerability list, encryption verification | 15-25 min |</a:t>
+            </a:r>
+          </a:p>
+          <a:p>
+            <a:r>
+              <a:rPr lang="en-MY" sz="5600" dirty="0"/>
+              <a:t>| </a:t>
+            </a:r>
+            <a:r>
+              <a:rPr lang="en-MY" sz="5600" b="1" dirty="0"/>
+              <a:t>**7. HIPAA Compliance Review**</a:t>
+            </a:r>
+            <a:r>
+              <a:rPr lang="en-MY" sz="5600" dirty="0"/>
+              <a:t> | </a:t>
+            </a:r>
+            <a:r>
+              <a:rPr lang="en-MY" sz="5600" b="1" dirty="0"/>
+              <a:t>**Manual**</a:t>
+            </a:r>
+            <a:r>
+              <a:rPr lang="en-MY" sz="5600" dirty="0"/>
+              <a:t> | PHI handling validation, audit trail verification, consent management review | Compliance certificate, audit report, risk assessment | 30-60 min |</a:t>
+            </a:r>
+          </a:p>
+          <a:p>
+            <a:r>
+              <a:rPr lang="en-MY" sz="5600" dirty="0"/>
+              <a:t>| </a:t>
+            </a:r>
+            <a:r>
+              <a:rPr lang="en-MY" sz="5600" b="1" dirty="0"/>
+              <a:t>**8. Staging Deployment**</a:t>
+            </a:r>
+            <a:r>
+              <a:rPr lang="en-MY" sz="5600" dirty="0"/>
+              <a:t> | Automated | Deploy to staging environment, smoke testing, environment validation | Deployment status, smoke test results, environment health | 5-10 min |</a:t>
+            </a:r>
+          </a:p>
+          <a:p>
+            <a:r>
+              <a:rPr lang="en-MY" sz="5600" dirty="0"/>
+              <a:t>| </a:t>
+            </a:r>
+            <a:r>
+              <a:rPr lang="en-MY" sz="5600" b="1" dirty="0"/>
+              <a:t>**9. User Acceptance Testing**</a:t>
+            </a:r>
+            <a:r>
+              <a:rPr lang="en-MY" sz="5600" dirty="0"/>
+              <a:t> | </a:t>
+            </a:r>
+            <a:r>
+              <a:rPr lang="en-MY" sz="5600" b="1" dirty="0"/>
+              <a:t>**Manual**</a:t>
+            </a:r>
+            <a:r>
+              <a:rPr lang="en-MY" sz="5600" dirty="0"/>
+              <a:t> | BDD scenario validation, business stakeholder approval, usability testing | UAT sign-off, BDD test results, stakeholder approval | 2-4 hours |</a:t>
+            </a:r>
+          </a:p>
+          <a:p>
+            <a:r>
+              <a:rPr lang="en-MY" sz="5600" dirty="0"/>
+              <a:t>| </a:t>
+            </a:r>
+            <a:r>
+              <a:rPr lang="en-MY" sz="5600" b="1" dirty="0"/>
+              <a:t>**10. Performance Testing**</a:t>
+            </a:r>
+            <a:r>
+              <a:rPr lang="en-MY" sz="5600" dirty="0"/>
+              <a:t> | Automated | Load testing, stress testing, appointment booking concurrency | Performance metrics, load test results, bottleneck analysis | 20-30 min |</a:t>
+            </a:r>
+          </a:p>
+          <a:p>
+            <a:r>
+              <a:rPr lang="en-MY" sz="5600" dirty="0"/>
+              <a:t>| </a:t>
+            </a:r>
+            <a:r>
+              <a:rPr lang="en-MY" sz="5600" b="1" dirty="0"/>
+              <a:t>**11. Production Deployment**</a:t>
+            </a:r>
+            <a:r>
+              <a:rPr lang="en-MY" sz="5600" dirty="0"/>
+              <a:t> | </a:t>
+            </a:r>
+            <a:r>
+              <a:rPr lang="en-MY" sz="5600" b="1" dirty="0"/>
+              <a:t>**Manual**</a:t>
+            </a:r>
+            <a:r>
+              <a:rPr lang="en-MY" sz="5600" dirty="0"/>
+              <a:t> | Blue-green deployment, database migration, feature flag activation | Deployment confirmation, rollback plan, monitoring activation | 15-30 min |</a:t>
+            </a:r>
+          </a:p>
+          <a:p>
+            <a:r>
+              <a:rPr lang="en-MY" sz="5600" dirty="0"/>
+              <a:t>| </a:t>
+            </a:r>
+            <a:r>
+              <a:rPr lang="en-MY" sz="5600" b="1" dirty="0"/>
+              <a:t>**12. Post-Deployment Validation**</a:t>
+            </a:r>
+            <a:r>
+              <a:rPr lang="en-MY" sz="5600" dirty="0"/>
+              <a:t> | Automated | Health checks, monitoring activation, alert configuration | System health status, monitoring dashboard, alert confirmation | 5-10 min |</a:t>
+            </a:r>
+          </a:p>
+          <a:p>
             <a:pPr marL="0" indent="0">
               <a:buNone/>
             </a:pPr>
-            <a:r>
-              <a:rPr lang="en-US" sz="2400" b="1">
-                <a:ea typeface="+mn-lt"/>
-                <a:cs typeface="+mn-lt"/>
-              </a:rPr>
-              <a:t>CI/CD Pipeline Planning</a:t>
-            </a:r>
-            <a:endParaRPr lang="en-US" sz="2400" b="1" dirty="0">
-              <a:ea typeface="+mn-lt"/>
-              <a:cs typeface="+mn-lt"/>
-            </a:endParaRPr>
-          </a:p>
-          <a:p>
-            <a:pPr marL="0" indent="0">
-              <a:buNone/>
-            </a:pPr>
-            <a:r>
-              <a:rPr lang="en-US" sz="1800" dirty="0">
-                <a:highlight>
-                  <a:srgbClr val="FFFF00"/>
-                </a:highlight>
-                <a:ea typeface="+mn-lt"/>
-                <a:cs typeface="+mn-lt"/>
-              </a:rPr>
-              <a:t>[Document all pipeline stages with plain-language descriptions, responsibilities, analyst checkpoints, expected outputs, risks, and responses.]</a:t>
-            </a:r>
-            <a:endParaRPr lang="en-US" sz="1800">
+            <a:endParaRPr lang="en-US" sz="1800" dirty="0">
               <a:highlight>
                 <a:srgbClr val="FFFF00"/>
               </a:highlight>
@@ -20499,6 +20840,13 @@
   <p:clrMapOvr>
     <a:masterClrMapping/>
   </p:clrMapOvr>
+  <p:timing>
+    <p:tnLst>
+      <p:par>
+        <p:cTn id="1" dur="indefinite" restart="never" nodeType="tmRoot"/>
+      </p:par>
+    </p:tnLst>
+  </p:timing>
 </p:sld>
 </file>
 
@@ -20576,8 +20924,8 @@
         </p:nvSpPr>
         <p:spPr>
           <a:xfrm>
-            <a:off x="573087" y="1216025"/>
-            <a:ext cx="10659485" cy="4503738"/>
+            <a:off x="573087" y="984670"/>
+            <a:ext cx="11220980" cy="5263730"/>
           </a:xfrm>
           <a:prstGeom prst="rect">
             <a:avLst/>
@@ -20585,7 +20933,7 @@
         </p:spPr>
         <p:txBody>
           <a:bodyPr vert="horz" lIns="91440" tIns="45720" rIns="91440" bIns="45720" rtlCol="0" anchor="t">
-            <a:normAutofit/>
+            <a:normAutofit fontScale="25000" lnSpcReduction="20000"/>
           </a:bodyPr>
           <a:lstStyle>
             <a:lvl1pPr marL="228600" indent="-228600" algn="l" defTabSz="914400" rtl="0" eaLnBrk="1" latinLnBrk="0" hangingPunct="1">
@@ -20766,28 +21114,299 @@
               <a:buNone/>
             </a:pPr>
             <a:r>
-              <a:rPr lang="en-US" sz="2400" b="1" dirty="0">
+              <a:rPr lang="en-US" sz="4800" b="1" dirty="0">
                 <a:ea typeface="+mn-lt"/>
                 <a:cs typeface="+mn-lt"/>
               </a:rPr>
               <a:t>Monitoring and maintenance strategy</a:t>
             </a:r>
-            <a:endParaRPr lang="en-US" dirty="0"/>
+            <a:endParaRPr lang="en-US" sz="4800" dirty="0"/>
+          </a:p>
+          <a:p>
+            <a:r>
+              <a:rPr lang="en-US" sz="4800" b="1" dirty="0"/>
+              <a:t>#### **Metric 1: Appointment Booking Success Rate**</a:t>
+            </a:r>
+            <a:endParaRPr lang="en-US" sz="4800" dirty="0"/>
+          </a:p>
+          <a:p>
+            <a:r>
+              <a:rPr lang="en-US" sz="4800" dirty="0"/>
+              <a:t>- </a:t>
+            </a:r>
+            <a:r>
+              <a:rPr lang="en-US" sz="4800" b="1" dirty="0"/>
+              <a:t>**Description:**</a:t>
+            </a:r>
+            <a:r>
+              <a:rPr lang="en-US" sz="4800" dirty="0"/>
+              <a:t> Percentage of successful appointment bookings vs. total attempts</a:t>
+            </a:r>
+          </a:p>
+          <a:p>
+            <a:r>
+              <a:rPr lang="en-US" sz="4800" dirty="0"/>
+              <a:t>- </a:t>
+            </a:r>
+            <a:r>
+              <a:rPr lang="en-US" sz="4800" b="1" dirty="0"/>
+              <a:t>**Target:**</a:t>
+            </a:r>
+            <a:r>
+              <a:rPr lang="en-US" sz="4800" dirty="0"/>
+              <a:t> ≥ 99.5%</a:t>
+            </a:r>
+          </a:p>
+          <a:p>
+            <a:r>
+              <a:rPr lang="en-US" sz="4800" dirty="0"/>
+              <a:t>- </a:t>
+            </a:r>
+            <a:r>
+              <a:rPr lang="en-US" sz="4800" b="1" dirty="0"/>
+              <a:t>**Data Source:**</a:t>
+            </a:r>
+            <a:r>
+              <a:rPr lang="en-US" sz="4800" dirty="0"/>
+              <a:t> Application logs, database transactions</a:t>
+            </a:r>
+          </a:p>
+          <a:p>
+            <a:r>
+              <a:rPr lang="en-US" sz="4800" dirty="0"/>
+              <a:t>- </a:t>
+            </a:r>
+            <a:r>
+              <a:rPr lang="en-US" sz="4800" b="1" dirty="0"/>
+              <a:t>**Business Impact:**</a:t>
+            </a:r>
+            <a:r>
+              <a:rPr lang="en-US" sz="4800" dirty="0"/>
+              <a:t> Direct patient experience indicator</a:t>
+            </a:r>
+          </a:p>
+          <a:p>
+            <a:r>
+              <a:rPr lang="en-US" sz="4800" dirty="0"/>
+              <a:t/>
+            </a:r>
+            <a:br>
+              <a:rPr lang="en-US" sz="4800" dirty="0"/>
+            </a:br>
+            <a:r>
+              <a:rPr lang="en-US" sz="4800" b="1" dirty="0"/>
+              <a:t>#### **Metric 2: Authentication Failure Rate**</a:t>
+            </a:r>
+            <a:endParaRPr lang="en-US" sz="4800" dirty="0"/>
+          </a:p>
+          <a:p>
+            <a:r>
+              <a:rPr lang="en-US" sz="4800" dirty="0"/>
+              <a:t>- </a:t>
+            </a:r>
+            <a:r>
+              <a:rPr lang="en-US" sz="4800" b="1" dirty="0"/>
+              <a:t>**Description:**</a:t>
+            </a:r>
+            <a:r>
+              <a:rPr lang="en-US" sz="4800" dirty="0"/>
+              <a:t> Failed login attempts per </a:t>
+            </a:r>
+            <a:r>
+              <a:rPr lang="en-US" sz="4800" dirty="0" err="1"/>
+              <a:t>PatientID</a:t>
+            </a:r>
+            <a:r>
+              <a:rPr lang="en-US" sz="4800" dirty="0"/>
+              <a:t> (linked to TC-002, TC-005)</a:t>
+            </a:r>
+          </a:p>
+          <a:p>
+            <a:r>
+              <a:rPr lang="en-US" sz="4800" dirty="0"/>
+              <a:t>- </a:t>
+            </a:r>
+            <a:r>
+              <a:rPr lang="en-US" sz="4800" b="1" dirty="0"/>
+              <a:t>**Target:**</a:t>
+            </a:r>
+            <a:r>
+              <a:rPr lang="en-US" sz="4800" dirty="0"/>
+              <a:t> &lt; 2% of total attempts</a:t>
+            </a:r>
+          </a:p>
+          <a:p>
+            <a:r>
+              <a:rPr lang="en-US" sz="4800" dirty="0"/>
+              <a:t>- </a:t>
+            </a:r>
+            <a:r>
+              <a:rPr lang="en-US" sz="4800" b="1" dirty="0"/>
+              <a:t>**Data Source:**</a:t>
+            </a:r>
+            <a:r>
+              <a:rPr lang="en-US" sz="4800" dirty="0"/>
+              <a:t> Authentication service logs</a:t>
+            </a:r>
+          </a:p>
+          <a:p>
+            <a:r>
+              <a:rPr lang="en-US" sz="4800" dirty="0"/>
+              <a:t>- </a:t>
+            </a:r>
+            <a:r>
+              <a:rPr lang="en-US" sz="4800" b="1" dirty="0"/>
+              <a:t>**Business Impact:**</a:t>
+            </a:r>
+            <a:r>
+              <a:rPr lang="en-US" sz="4800" dirty="0"/>
+              <a:t> Security and user experience</a:t>
+            </a:r>
+          </a:p>
+          <a:p>
+            <a:r>
+              <a:rPr lang="en-US" sz="4800" dirty="0"/>
+              <a:t/>
+            </a:r>
+            <a:br>
+              <a:rPr lang="en-US" sz="4800" dirty="0"/>
+            </a:br>
+            <a:r>
+              <a:rPr lang="en-US" sz="4800" b="1" dirty="0"/>
+              <a:t>#### **Metric 3: System Response Time**</a:t>
+            </a:r>
+            <a:endParaRPr lang="en-US" sz="4800" dirty="0"/>
+          </a:p>
+          <a:p>
+            <a:r>
+              <a:rPr lang="en-US" sz="4800" dirty="0"/>
+              <a:t>- </a:t>
+            </a:r>
+            <a:r>
+              <a:rPr lang="en-US" sz="4800" b="1" dirty="0"/>
+              <a:t>**Description:**</a:t>
+            </a:r>
+            <a:r>
+              <a:rPr lang="en-US" sz="4800" dirty="0"/>
+              <a:t> Average API response time for appointment booking</a:t>
+            </a:r>
+          </a:p>
+          <a:p>
+            <a:r>
+              <a:rPr lang="en-US" sz="4800" dirty="0"/>
+              <a:t>- </a:t>
+            </a:r>
+            <a:r>
+              <a:rPr lang="en-US" sz="4800" b="1" dirty="0"/>
+              <a:t>**Target:**</a:t>
+            </a:r>
+            <a:r>
+              <a:rPr lang="en-US" sz="4800" dirty="0"/>
+              <a:t> &lt; 2 seconds for 95th percentile</a:t>
+            </a:r>
+          </a:p>
+          <a:p>
+            <a:r>
+              <a:rPr lang="en-US" sz="4800" dirty="0"/>
+              <a:t>- </a:t>
+            </a:r>
+            <a:r>
+              <a:rPr lang="en-US" sz="4800" b="1" dirty="0"/>
+              <a:t>**Data Source:**</a:t>
+            </a:r>
+            <a:r>
+              <a:rPr lang="en-US" sz="4800" dirty="0"/>
+              <a:t> APM tools, load balancer logs</a:t>
+            </a:r>
+          </a:p>
+          <a:p>
+            <a:r>
+              <a:rPr lang="en-US" sz="4800" dirty="0"/>
+              <a:t>- </a:t>
+            </a:r>
+            <a:r>
+              <a:rPr lang="en-US" sz="4800" b="1" dirty="0"/>
+              <a:t>**Business Impact:**</a:t>
+            </a:r>
+            <a:r>
+              <a:rPr lang="en-US" sz="4800" dirty="0"/>
+              <a:t> Patient satisfaction and system performance</a:t>
+            </a:r>
+          </a:p>
+          <a:p>
+            <a:r>
+              <a:rPr lang="en-US" sz="4800" dirty="0"/>
+              <a:t/>
+            </a:r>
+            <a:br>
+              <a:rPr lang="en-US" sz="4800" dirty="0"/>
+            </a:br>
+            <a:r>
+              <a:rPr lang="en-US" sz="4800" b="1" dirty="0"/>
+              <a:t>#### **Metric 4: HIPAA Audit Trail Completeness**</a:t>
+            </a:r>
+            <a:endParaRPr lang="en-US" sz="4800" dirty="0"/>
+          </a:p>
+          <a:p>
+            <a:r>
+              <a:rPr lang="en-US" sz="4800" dirty="0"/>
+              <a:t>- </a:t>
+            </a:r>
+            <a:r>
+              <a:rPr lang="en-US" sz="4800" b="1" dirty="0"/>
+              <a:t>**Description:**</a:t>
+            </a:r>
+            <a:r>
+              <a:rPr lang="en-US" sz="4800" dirty="0"/>
+              <a:t> Percentage of patient data access events with complete audit logs</a:t>
+            </a:r>
+          </a:p>
+          <a:p>
+            <a:r>
+              <a:rPr lang="en-US" sz="4800" dirty="0"/>
+              <a:t>- </a:t>
+            </a:r>
+            <a:r>
+              <a:rPr lang="en-US" sz="4800" b="1" dirty="0"/>
+              <a:t>**Target:**</a:t>
+            </a:r>
+            <a:r>
+              <a:rPr lang="en-US" sz="4800" dirty="0"/>
+              <a:t> 100%</a:t>
+            </a:r>
+          </a:p>
+          <a:p>
+            <a:r>
+              <a:rPr lang="en-US" sz="4800" dirty="0"/>
+              <a:t>- </a:t>
+            </a:r>
+            <a:r>
+              <a:rPr lang="en-US" sz="4800" b="1" dirty="0"/>
+              <a:t>**Data Source:**</a:t>
+            </a:r>
+            <a:r>
+              <a:rPr lang="en-US" sz="4800" dirty="0"/>
+              <a:t> Audit logging system</a:t>
+            </a:r>
+          </a:p>
+          <a:p>
+            <a:r>
+              <a:rPr lang="en-US" sz="4800" dirty="0"/>
+              <a:t>- </a:t>
+            </a:r>
+            <a:r>
+              <a:rPr lang="en-US" sz="4800" b="1" dirty="0"/>
+              <a:t>**Business Impact:**</a:t>
+            </a:r>
+            <a:r>
+              <a:rPr lang="en-US" sz="4800" dirty="0"/>
+              <a:t> Regulatory compliance and legal protection</a:t>
+            </a:r>
           </a:p>
           <a:p>
             <a:pPr marL="0" indent="0">
               <a:buNone/>
             </a:pPr>
-            <a:r>
-              <a:rPr lang="en-US" sz="1800" dirty="0">
-                <a:highlight>
-                  <a:srgbClr val="FFFF00"/>
-                </a:highlight>
-                <a:ea typeface="+mn-lt"/>
-                <a:cs typeface="+mn-lt"/>
-              </a:rPr>
-              <a:t>[Define key metrics, alerting rules, maintenance tasks, and an incident response workflow to ensure post-deployment stability and safety.]</a:t>
-            </a:r>
             <a:endParaRPr lang="en-US" dirty="0"/>
           </a:p>
         </p:txBody>
@@ -20802,6 +21421,13 @@
   <p:clrMapOvr>
     <a:masterClrMapping/>
   </p:clrMapOvr>
+  <p:timing>
+    <p:tnLst>
+      <p:par>
+        <p:cTn id="1" dur="indefinite" restart="never" nodeType="tmRoot"/>
+      </p:par>
+    </p:tnLst>
+  </p:timing>
 </p:sld>
 </file>
 
@@ -20865,6 +21491,13 @@
   <p:clrMapOvr>
     <a:masterClrMapping/>
   </p:clrMapOvr>
+  <p:timing>
+    <p:tnLst>
+      <p:par>
+        <p:cTn id="1" dur="indefinite" restart="never" nodeType="tmRoot"/>
+      </p:par>
+    </p:tnLst>
+  </p:timing>
 </p:sld>
 </file>
 
@@ -21131,16 +21764,6 @@
             <a:pPr marL="0" indent="0">
               <a:buNone/>
             </a:pPr>
-            <a:r>
-              <a:rPr lang="en-US" sz="1800" dirty="0">
-                <a:highlight>
-                  <a:srgbClr val="FFFF00"/>
-                </a:highlight>
-                <a:ea typeface="+mn-lt"/>
-                <a:cs typeface="+mn-lt"/>
-              </a:rPr>
-              <a:t>[Summarize the top three evidence-backed insights with supporting metrics.]</a:t>
-            </a:r>
             <a:endParaRPr lang="en-US" sz="1800" dirty="0">
               <a:highlight>
                 <a:srgbClr val="FFFF00"/>
@@ -21286,35 +21909,19 @@
           </a:bodyPr>
           <a:lstStyle/>
           <a:p>
-            <a:pPr marL="0" indent="0">
-              <a:buNone/>
-            </a:pPr>
-            <a:r>
-              <a:rPr lang="en-US" sz="1800" b="1" dirty="0">
-                <a:highlight>
-                  <a:srgbClr val="FFFF00"/>
-                </a:highlight>
-                <a:cs typeface="Arial"/>
-              </a:rPr>
-              <a:t>[List the areas of improvement in 6 bullet points.]</a:t>
-            </a:r>
-          </a:p>
-          <a:p>
-            <a:endParaRPr lang="en-US" sz="1800" dirty="0">
-              <a:cs typeface="Arial" panose="020B0604020202020204" pitchFamily="34" charset="0"/>
-            </a:endParaRPr>
-          </a:p>
-          <a:p>
             <a:pPr marL="457200" indent="-457200">
               <a:buFont typeface="+mj-lt"/>
               <a:buAutoNum type="arabicPeriod"/>
             </a:pPr>
             <a:r>
-              <a:rPr lang="en-US" sz="1800" dirty="0">
+              <a:rPr lang="en-US" sz="1800" dirty="0" smtClean="0">
                 <a:cs typeface="Arial" panose="020B0604020202020204" pitchFamily="34" charset="0"/>
               </a:rPr>
               <a:t> </a:t>
             </a:r>
+            <a:endParaRPr lang="en-US" sz="1800" dirty="0">
+              <a:cs typeface="Arial" panose="020B0604020202020204" pitchFamily="34" charset="0"/>
+            </a:endParaRPr>
           </a:p>
           <a:p>
             <a:pPr marL="457200" indent="-457200">
@@ -21661,16 +22268,6 @@
             <a:pPr marL="0" indent="0">
               <a:buNone/>
             </a:pPr>
-            <a:r>
-              <a:rPr lang="en-US" sz="1800" dirty="0">
-                <a:highlight>
-                  <a:srgbClr val="FFFF00"/>
-                </a:highlight>
-                <a:ea typeface="+mn-lt"/>
-                <a:cs typeface="+mn-lt"/>
-              </a:rPr>
-              <a:t>[Present 3–4 prioritized recommendations with expected impact.]</a:t>
-            </a:r>
             <a:endParaRPr lang="en-US" sz="1800" dirty="0">
               <a:highlight>
                 <a:srgbClr val="FFFF00"/>
@@ -22012,14 +22609,6 @@
             <a:pPr marL="0" indent="0">
               <a:buNone/>
             </a:pPr>
-            <a:r>
-              <a:rPr lang="en-US" sz="1800" dirty="0">
-                <a:highlight>
-                  <a:srgbClr val="FFFF00"/>
-                </a:highlight>
-              </a:rPr>
-              <a:t>[Provide a summary of observations in 3–5 bullet points.]</a:t>
-            </a:r>
             <a:endParaRPr lang="en-US" sz="1800" dirty="0">
               <a:highlight>
                 <a:srgbClr val="FFFF00"/>
@@ -22377,619 +22966,6 @@
   <p:clrMapOvr>
     <a:masterClrMapping/>
   </p:clrMapOvr>
-</p:sld>
-</file>
-
-<file path=ppt/slides/slide43.xml><?xml version="1.0" encoding="utf-8"?>
-<p:sld xmlns:a="http://schemas.openxmlformats.org/drawingml/2006/main" xmlns:r="http://schemas.openxmlformats.org/officeDocument/2006/relationships" xmlns:p="http://schemas.openxmlformats.org/presentationml/2006/main" show="0">
-  <p:cSld>
-    <p:spTree>
-      <p:nvGrpSpPr>
-        <p:cNvPr id="1" name=""/>
-        <p:cNvGrpSpPr/>
-        <p:nvPr/>
-      </p:nvGrpSpPr>
-      <p:grpSpPr>
-        <a:xfrm>
-          <a:off x="0" y="0"/>
-          <a:ext cx="0" cy="0"/>
-          <a:chOff x="0" y="0"/>
-          <a:chExt cx="0" cy="0"/>
-        </a:xfrm>
-      </p:grpSpPr>
-      <p:sp>
-        <p:nvSpPr>
-          <p:cNvPr id="2" name="Title 1">
-            <a:extLst>
-              <a:ext uri="{FF2B5EF4-FFF2-40B4-BE49-F238E27FC236}">
-                <a16:creationId xmlns:a16="http://schemas.microsoft.com/office/drawing/2014/main" id="{AE0486F9-4C47-EBC2-FC9E-C576B0E65EC7}"/>
-              </a:ext>
-            </a:extLst>
-          </p:cNvPr>
-          <p:cNvSpPr>
-            <a:spLocks noGrp="1"/>
-          </p:cNvSpPr>
-          <p:nvPr>
-            <p:ph type="title"/>
-          </p:nvPr>
-        </p:nvSpPr>
-        <p:spPr>
-          <a:xfrm>
-            <a:off x="838200" y="794182"/>
-            <a:ext cx="10515600" cy="1325563"/>
-          </a:xfrm>
-        </p:spPr>
-        <p:txBody>
-          <a:bodyPr/>
-          <a:lstStyle/>
-          <a:p>
-            <a:r>
-              <a:rPr lang="en-US" dirty="0"/>
-              <a:t>How to Use This Template</a:t>
-            </a:r>
-            <a:endParaRPr lang="en-IN" dirty="0"/>
-          </a:p>
-        </p:txBody>
-      </p:sp>
-      <p:sp>
-        <p:nvSpPr>
-          <p:cNvPr id="3" name="Content Placeholder 2">
-            <a:extLst>
-              <a:ext uri="{FF2B5EF4-FFF2-40B4-BE49-F238E27FC236}">
-                <a16:creationId xmlns:a16="http://schemas.microsoft.com/office/drawing/2014/main" id="{D6C25AC1-C670-CA4D-02CE-E1BA22231CBB}"/>
-              </a:ext>
-            </a:extLst>
-          </p:cNvPr>
-          <p:cNvSpPr>
-            <a:spLocks noGrp="1"/>
-          </p:cNvSpPr>
-          <p:nvPr>
-            <p:ph idx="1"/>
-          </p:nvPr>
-        </p:nvSpPr>
-        <p:spPr>
-          <a:xfrm>
-            <a:off x="838200" y="1953491"/>
-            <a:ext cx="10515600" cy="2784765"/>
-          </a:xfrm>
-        </p:spPr>
-        <p:txBody>
-          <a:bodyPr vert="horz" lIns="91440" tIns="45720" rIns="91440" bIns="45720" rtlCol="0" anchor="t">
-            <a:normAutofit fontScale="92500" lnSpcReduction="20000"/>
-          </a:bodyPr>
-          <a:lstStyle/>
-          <a:p>
-            <a:pPr marL="229870" indent="-229870" algn="l">
-              <a:buFont typeface="Arial" panose="020B0604020202020204" pitchFamily="34" charset="0"/>
-              <a:buChar char="•"/>
-            </a:pPr>
-            <a:r>
-              <a:rPr lang="en-US" sz="2000" dirty="0"/>
-              <a:t>Follow the instructions in the </a:t>
-            </a:r>
-            <a:r>
-              <a:rPr lang="en-US" sz="2000" b="1" dirty="0"/>
-              <a:t>Lab: Unified IT Solutions for XYZ Solutions</a:t>
-            </a:r>
-            <a:r>
-              <a:rPr lang="en-US" sz="2000" dirty="0"/>
-              <a:t> to create this presentation.</a:t>
-            </a:r>
-            <a:endParaRPr lang="en-US" dirty="0"/>
-          </a:p>
-          <a:p>
-            <a:pPr marL="229870" indent="-229870" algn="l">
-              <a:buFont typeface="Arial" panose="020B0604020202020204" pitchFamily="34" charset="0"/>
-              <a:buChar char="•"/>
-            </a:pPr>
-            <a:r>
-              <a:rPr lang="en-US" sz="2000" dirty="0"/>
-              <a:t>Ensure all content is visible on the slides. Content in the notes section will not be included.</a:t>
-            </a:r>
-            <a:endParaRPr lang="en-US" sz="2000" dirty="0">
-              <a:ea typeface="+mn-lt"/>
-              <a:cs typeface="+mn-lt"/>
-            </a:endParaRPr>
-          </a:p>
-          <a:p>
-            <a:pPr marL="229870" indent="-229870" algn="l">
-              <a:buFont typeface="Arial" panose="020B0604020202020204" pitchFamily="34" charset="0"/>
-              <a:buChar char="•"/>
-            </a:pPr>
-            <a:r>
-              <a:rPr lang="en-US" sz="2000" b="1" dirty="0">
-                <a:ea typeface="+mn-lt"/>
-                <a:cs typeface="+mn-lt"/>
-              </a:rPr>
-              <a:t>Do not insert screenshots</a:t>
-            </a:r>
-            <a:r>
-              <a:rPr lang="en-US" sz="2000" dirty="0">
-                <a:ea typeface="+mn-lt"/>
-                <a:cs typeface="+mn-lt"/>
-              </a:rPr>
-              <a:t> of the completed templates. Instead, copy and paste the tables directly from the Word/Excel templates into the slides.</a:t>
-            </a:r>
-          </a:p>
-          <a:p>
-            <a:pPr marL="229870" indent="-229870" algn="l">
-              <a:buFont typeface="Arial" panose="020B0604020202020204" pitchFamily="34" charset="0"/>
-              <a:buChar char="•"/>
-            </a:pPr>
-            <a:r>
-              <a:rPr lang="en-US" sz="2000" dirty="0">
-                <a:ea typeface="+mn-lt"/>
-                <a:cs typeface="+mn-lt"/>
-              </a:rPr>
-              <a:t>Avoid animations, as they may not display consistently</a:t>
-            </a:r>
-            <a:r>
-              <a:rPr lang="en-US" sz="2000" dirty="0"/>
-              <a:t>.</a:t>
-            </a:r>
-            <a:endParaRPr lang="en-US" sz="2000" dirty="0">
-              <a:cs typeface="Arial"/>
-            </a:endParaRPr>
-          </a:p>
-          <a:p>
-            <a:pPr marL="230400" indent="-230400" algn="l">
-              <a:buFont typeface="Arial" panose="020B0604020202020204" pitchFamily="34" charset="0"/>
-              <a:buChar char="•"/>
-            </a:pPr>
-            <a:r>
-              <a:rPr lang="en-US" sz="2000" dirty="0">
-                <a:solidFill>
-                  <a:schemeClr val="bg2">
-                    <a:lumMod val="10000"/>
-                  </a:schemeClr>
-                </a:solidFill>
-              </a:rPr>
-              <a:t>Add as many slides as needed to effectively present your content. </a:t>
-            </a:r>
-          </a:p>
-          <a:p>
-            <a:pPr marL="230400" indent="-230400" algn="l">
-              <a:buFont typeface="Arial" panose="020B0604020202020204" pitchFamily="34" charset="0"/>
-              <a:buChar char="•"/>
-            </a:pPr>
-            <a:r>
-              <a:rPr lang="en-US" sz="2000" dirty="0">
-                <a:solidFill>
-                  <a:schemeClr val="bg2">
-                    <a:lumMod val="10000"/>
-                  </a:schemeClr>
-                </a:solidFill>
-              </a:rPr>
-              <a:t>Expand the template tables with additional rows as necessary.</a:t>
-            </a:r>
-          </a:p>
-          <a:p>
-            <a:pPr marL="230400" indent="-230400" algn="l">
-              <a:buFont typeface="Arial" panose="020B0604020202020204" pitchFamily="34" charset="0"/>
-              <a:buChar char="•"/>
-            </a:pPr>
-            <a:r>
-              <a:rPr lang="en-US" sz="2000" dirty="0">
-                <a:solidFill>
-                  <a:schemeClr val="bg2">
-                    <a:lumMod val="10000"/>
-                  </a:schemeClr>
-                </a:solidFill>
-              </a:rPr>
-              <a:t>Feel free to include images or other elements to enhance your presentation.</a:t>
-            </a:r>
-          </a:p>
-        </p:txBody>
-      </p:sp>
-      <p:sp>
-        <p:nvSpPr>
-          <p:cNvPr id="4" name="TextBox 3">
-            <a:extLst>
-              <a:ext uri="{FF2B5EF4-FFF2-40B4-BE49-F238E27FC236}">
-                <a16:creationId xmlns:a16="http://schemas.microsoft.com/office/drawing/2014/main" id="{2F345217-8133-BEB6-5F12-85BB09D10B73}"/>
-              </a:ext>
-            </a:extLst>
-          </p:cNvPr>
-          <p:cNvSpPr txBox="1"/>
-          <p:nvPr/>
-        </p:nvSpPr>
-        <p:spPr>
-          <a:xfrm>
-            <a:off x="966355" y="4909381"/>
-            <a:ext cx="10387445" cy="984885"/>
-          </a:xfrm>
-          <a:prstGeom prst="rect">
-            <a:avLst/>
-          </a:prstGeom>
-          <a:solidFill>
-            <a:schemeClr val="bg1">
-              <a:lumMod val="95000"/>
-            </a:schemeClr>
-          </a:solidFill>
-          <a:ln>
-            <a:noFill/>
-            <a:prstDash val="sysDash"/>
-          </a:ln>
-        </p:spPr>
-        <p:txBody>
-          <a:bodyPr wrap="square" lIns="91440" tIns="45720" rIns="91440" bIns="45720" rtlCol="0" anchor="t">
-            <a:spAutoFit/>
-          </a:bodyPr>
-          <a:lstStyle/>
-          <a:p>
-            <a:r>
-              <a:rPr lang="en-US" sz="2000" b="1" i="1" dirty="0">
-                <a:solidFill>
-                  <a:srgbClr val="DA1E28"/>
-                </a:solidFill>
-              </a:rPr>
-              <a:t>Note: Before submission, remove the instruction and table of contents slides, as well as any placeholder instructions highlighted in yellow on individual slide.</a:t>
-            </a:r>
-            <a:r>
-              <a:rPr lang="en-US" dirty="0"/>
-              <a:t/>
-            </a:r>
-            <a:br>
-              <a:rPr lang="en-US" dirty="0"/>
-            </a:br>
-            <a:endParaRPr lang="en-US">
-              <a:cs typeface="Arial"/>
-            </a:endParaRPr>
-          </a:p>
-        </p:txBody>
-      </p:sp>
-    </p:spTree>
-    <p:extLst>
-      <p:ext uri="{BB962C8B-B14F-4D97-AF65-F5344CB8AC3E}">
-        <p14:creationId xmlns:p14="http://schemas.microsoft.com/office/powerpoint/2010/main" val="1532860888"/>
-      </p:ext>
-    </p:extLst>
-  </p:cSld>
-  <p:clrMapOvr>
-    <a:masterClrMapping/>
-  </p:clrMapOvr>
-  <mc:AlternateContent xmlns:mc="http://schemas.openxmlformats.org/markup-compatibility/2006" xmlns:p14="http://schemas.microsoft.com/office/powerpoint/2010/main">
-    <mc:Choice Requires="p14">
-      <p:transition spd="slow" p14:dur="2000"/>
-    </mc:Choice>
-    <mc:Fallback xmlns="">
-      <p:transition spd="slow"/>
-    </mc:Fallback>
-  </mc:AlternateContent>
-  <p:timing>
-    <p:tnLst>
-      <p:par>
-        <p:cTn id="1" dur="indefinite" restart="never" nodeType="tmRoot"/>
-      </p:par>
-    </p:tnLst>
-  </p:timing>
-</p:sld>
-</file>
-
-<file path=ppt/slides/slide44.xml><?xml version="1.0" encoding="utf-8"?>
-<p:sld xmlns:a="http://schemas.openxmlformats.org/drawingml/2006/main" xmlns:r="http://schemas.openxmlformats.org/officeDocument/2006/relationships" xmlns:p="http://schemas.openxmlformats.org/presentationml/2006/main" show="0">
-  <p:cSld>
-    <p:spTree>
-      <p:nvGrpSpPr>
-        <p:cNvPr id="1" name=""/>
-        <p:cNvGrpSpPr/>
-        <p:nvPr/>
-      </p:nvGrpSpPr>
-      <p:grpSpPr>
-        <a:xfrm>
-          <a:off x="0" y="0"/>
-          <a:ext cx="0" cy="0"/>
-          <a:chOff x="0" y="0"/>
-          <a:chExt cx="0" cy="0"/>
-        </a:xfrm>
-      </p:grpSpPr>
-      <p:sp>
-        <p:nvSpPr>
-          <p:cNvPr id="2" name="Title 1">
-            <a:extLst>
-              <a:ext uri="{FF2B5EF4-FFF2-40B4-BE49-F238E27FC236}">
-                <a16:creationId xmlns:a16="http://schemas.microsoft.com/office/drawing/2014/main" id="{7913B8DD-61E1-757A-4429-B01A52D1D840}"/>
-              </a:ext>
-            </a:extLst>
-          </p:cNvPr>
-          <p:cNvSpPr>
-            <a:spLocks noGrp="1"/>
-          </p:cNvSpPr>
-          <p:nvPr>
-            <p:ph type="title"/>
-          </p:nvPr>
-        </p:nvSpPr>
-        <p:spPr>
-          <a:xfrm>
-            <a:off x="572756" y="133943"/>
-            <a:ext cx="9813446" cy="850726"/>
-          </a:xfrm>
-        </p:spPr>
-        <p:txBody>
-          <a:bodyPr>
-            <a:normAutofit/>
-          </a:bodyPr>
-          <a:lstStyle/>
-          <a:p>
-            <a:r>
-              <a:rPr lang="en-US" dirty="0"/>
-              <a:t>Table of Contents</a:t>
-            </a:r>
-          </a:p>
-        </p:txBody>
-      </p:sp>
-      <p:sp>
-        <p:nvSpPr>
-          <p:cNvPr id="3" name="Content Placeholder 2">
-            <a:extLst>
-              <a:ext uri="{FF2B5EF4-FFF2-40B4-BE49-F238E27FC236}">
-                <a16:creationId xmlns:a16="http://schemas.microsoft.com/office/drawing/2014/main" id="{79DC3C78-4448-4D1D-97E7-E642B12828B1}"/>
-              </a:ext>
-            </a:extLst>
-          </p:cNvPr>
-          <p:cNvSpPr>
-            <a:spLocks noGrp="1"/>
-          </p:cNvSpPr>
-          <p:nvPr>
-            <p:ph idx="4294967295"/>
-          </p:nvPr>
-        </p:nvSpPr>
-        <p:spPr>
-          <a:xfrm>
-            <a:off x="716973" y="1341438"/>
-            <a:ext cx="10515600" cy="4435475"/>
-          </a:xfrm>
-        </p:spPr>
-        <p:txBody>
-          <a:bodyPr vert="horz" lIns="91440" tIns="45720" rIns="91440" bIns="45720" numCol="2" spcCol="720000" rtlCol="0" anchor="t">
-            <a:noAutofit/>
-          </a:bodyPr>
-          <a:lstStyle/>
-          <a:p>
-            <a:pPr marL="230400" indent="-230400"/>
-            <a:r>
-              <a:rPr lang="en-US" sz="1600" dirty="0">
-                <a:solidFill>
-                  <a:schemeClr val="bg2">
-                    <a:lumMod val="10000"/>
-                  </a:schemeClr>
-                </a:solidFill>
-              </a:rPr>
-              <a:t>Executive Summary</a:t>
-            </a:r>
-          </a:p>
-          <a:p>
-            <a:pPr marL="230400" indent="-230400"/>
-            <a:r>
-              <a:rPr lang="en-US" sz="1600" dirty="0">
-                <a:solidFill>
-                  <a:schemeClr val="bg2">
-                    <a:lumMod val="10000"/>
-                  </a:schemeClr>
-                </a:solidFill>
-              </a:rPr>
-              <a:t>Introduction</a:t>
-            </a:r>
-          </a:p>
-          <a:p>
-            <a:pPr marL="230400" indent="-230400"/>
-            <a:r>
-              <a:rPr lang="en-US" sz="1600" dirty="0">
-                <a:solidFill>
-                  <a:schemeClr val="bg2">
-                    <a:lumMod val="10000"/>
-                  </a:schemeClr>
-                </a:solidFill>
-              </a:rPr>
-              <a:t>Business Objectives</a:t>
-            </a:r>
-          </a:p>
-          <a:p>
-            <a:pPr marL="230400" indent="-230400"/>
-            <a:endParaRPr lang="en-US" sz="1600" dirty="0">
-              <a:solidFill>
-                <a:schemeClr val="bg2">
-                  <a:lumMod val="10000"/>
-                </a:schemeClr>
-              </a:solidFill>
-            </a:endParaRPr>
-          </a:p>
-          <a:p>
-            <a:pPr marL="230400" indent="-230400">
-              <a:buNone/>
-            </a:pPr>
-            <a:r>
-              <a:rPr lang="en-US" sz="1600" b="1" dirty="0">
-                <a:solidFill>
-                  <a:schemeClr val="bg2">
-                    <a:lumMod val="10000"/>
-                  </a:schemeClr>
-                </a:solidFill>
-              </a:rPr>
-              <a:t>Artifacts</a:t>
-            </a:r>
-          </a:p>
-          <a:p>
-            <a:pPr marL="229870" indent="-229870"/>
-            <a:r>
-              <a:rPr lang="en-US" sz="1600" dirty="0"/>
-              <a:t>Project Initiation and Stakeholder Engagement </a:t>
-            </a:r>
-          </a:p>
-          <a:p>
-            <a:pPr marL="229870" indent="-229870"/>
-            <a:r>
-              <a:rPr lang="en-US" sz="1600" dirty="0"/>
-              <a:t>Requirements Gathering</a:t>
-            </a:r>
-            <a:endParaRPr lang="en-US" sz="1600" dirty="0">
-              <a:cs typeface="Arial"/>
-            </a:endParaRPr>
-          </a:p>
-          <a:p>
-            <a:pPr marL="229870" indent="-229870"/>
-            <a:r>
-              <a:rPr lang="en-US" sz="1600" dirty="0"/>
-              <a:t>Project Planning and Risk Analysis</a:t>
-            </a:r>
-            <a:endParaRPr lang="en-US" sz="1600" dirty="0">
-              <a:cs typeface="Arial"/>
-            </a:endParaRPr>
-          </a:p>
-          <a:p>
-            <a:pPr marL="229870" indent="-229870"/>
-            <a:r>
-              <a:rPr lang="en-US" sz="1600" dirty="0"/>
-              <a:t>Process Modeling</a:t>
-            </a:r>
-            <a:endParaRPr lang="en-US" sz="1600" dirty="0">
-              <a:cs typeface="Arial"/>
-            </a:endParaRPr>
-          </a:p>
-          <a:p>
-            <a:pPr marL="229870" indent="-229870"/>
-            <a:r>
-              <a:rPr lang="en-US" sz="1600" dirty="0"/>
-              <a:t>Visualizations</a:t>
-            </a:r>
-            <a:endParaRPr lang="en-US" dirty="0"/>
-          </a:p>
-          <a:p>
-            <a:pPr marL="229870" indent="-229870"/>
-            <a:r>
-              <a:rPr lang="en-US" sz="1600" dirty="0"/>
-              <a:t>Dashboards</a:t>
-            </a:r>
-            <a:endParaRPr lang="en-US" dirty="0"/>
-          </a:p>
-          <a:p>
-            <a:pPr marL="229870" indent="-229870"/>
-            <a:r>
-              <a:rPr lang="en-US" sz="1600" dirty="0"/>
-              <a:t>System Design </a:t>
-            </a:r>
-            <a:endParaRPr lang="en-US" sz="1600" dirty="0">
-              <a:cs typeface="Arial"/>
-            </a:endParaRPr>
-          </a:p>
-          <a:p>
-            <a:pPr marL="229870" indent="-229870"/>
-            <a:r>
-              <a:rPr lang="en-US" sz="1600" dirty="0"/>
-              <a:t>Database Design</a:t>
-            </a:r>
-            <a:endParaRPr lang="en-US" sz="1600" dirty="0">
-              <a:cs typeface="Arial"/>
-            </a:endParaRPr>
-          </a:p>
-          <a:p>
-            <a:pPr marL="229870" indent="-229870"/>
-            <a:r>
-              <a:rPr lang="en-US" sz="1600" dirty="0"/>
-              <a:t>Test Planning and Case Design Using TDD and BDD</a:t>
-            </a:r>
-          </a:p>
-          <a:p>
-            <a:pPr marL="229870" indent="-229870"/>
-            <a:r>
-              <a:rPr lang="en-US" sz="1600" dirty="0"/>
-              <a:t>CI/CD Workflow and Monitoring Plan</a:t>
-            </a:r>
-            <a:endParaRPr lang="en-US" sz="1600" dirty="0">
-              <a:cs typeface="Arial"/>
-            </a:endParaRPr>
-          </a:p>
-          <a:p>
-            <a:pPr marL="229870" indent="-229870">
-              <a:buNone/>
-            </a:pPr>
-            <a:endParaRPr lang="en-US" sz="1600" b="1" dirty="0"/>
-          </a:p>
-          <a:p>
-            <a:pPr marL="229870" indent="-229870">
-              <a:buNone/>
-            </a:pPr>
-            <a:r>
-              <a:rPr lang="en-US" sz="1600" b="1" dirty="0"/>
-              <a:t>Findings and Recommendations</a:t>
-            </a:r>
-            <a:endParaRPr lang="en-US" dirty="0"/>
-          </a:p>
-          <a:p>
-            <a:pPr marL="230400" indent="-230400"/>
-            <a:r>
-              <a:rPr lang="en-US" sz="1600" dirty="0">
-                <a:solidFill>
-                  <a:schemeClr val="bg2">
-                    <a:lumMod val="10000"/>
-                  </a:schemeClr>
-                </a:solidFill>
-              </a:rPr>
-              <a:t>Key Findings</a:t>
-            </a:r>
-          </a:p>
-          <a:p>
-            <a:pPr marL="230400" indent="-230400"/>
-            <a:r>
-              <a:rPr lang="en-US" sz="1600" dirty="0">
-                <a:solidFill>
-                  <a:schemeClr val="bg2">
-                    <a:lumMod val="10000"/>
-                  </a:schemeClr>
-                </a:solidFill>
-              </a:rPr>
-              <a:t>Key Recommendations</a:t>
-            </a:r>
-          </a:p>
-          <a:p>
-            <a:pPr marL="230400" indent="-230400"/>
-            <a:r>
-              <a:rPr lang="en-US" sz="1600" dirty="0">
-                <a:solidFill>
-                  <a:schemeClr val="bg2">
-                    <a:lumMod val="10000"/>
-                  </a:schemeClr>
-                </a:solidFill>
-              </a:rPr>
-              <a:t>Conclusion</a:t>
-            </a:r>
-          </a:p>
-          <a:p>
-            <a:pPr marL="229870" indent="-229870"/>
-            <a:r>
-              <a:rPr lang="en-US" sz="1600" dirty="0">
-                <a:cs typeface="Arial"/>
-              </a:rPr>
-              <a:t>Appendix</a:t>
-            </a:r>
-          </a:p>
-        </p:txBody>
-      </p:sp>
-    </p:spTree>
-    <p:extLst>
-      <p:ext uri="{BB962C8B-B14F-4D97-AF65-F5344CB8AC3E}">
-        <p14:creationId xmlns:p14="http://schemas.microsoft.com/office/powerpoint/2010/main" val="473396290"/>
-      </p:ext>
-    </p:extLst>
-  </p:cSld>
-  <p:clrMapOvr>
-    <a:masterClrMapping/>
-  </p:clrMapOvr>
-  <mc:AlternateContent xmlns:mc="http://schemas.openxmlformats.org/markup-compatibility/2006" xmlns:p14="http://schemas.microsoft.com/office/powerpoint/2010/main">
-    <mc:Choice Requires="p14">
-      <p:transition spd="slow" p14:dur="2000"/>
-    </mc:Choice>
-    <mc:Fallback xmlns="">
-      <p:transition spd="slow"/>
-    </mc:Fallback>
-  </mc:AlternateContent>
-  <p:timing>
-    <p:tnLst>
-      <p:par>
-        <p:cTn id="1" dur="indefinite" restart="never" nodeType="tmRoot"/>
-      </p:par>
-    </p:tnLst>
-  </p:timing>
 </p:sld>
 </file>
 

--- a/Systems Analyst Capstone Project/Final SubmissionDL.pptx
+++ b/Systems Analyst Capstone Project/Final SubmissionDL.pptx
@@ -1758,7 +1758,7 @@
             <a:blip r:embed="rId2">
               <a:extLst>
                 <a:ext uri="{96DAC541-7B7A-43D3-8B79-37D633B846F1}">
-                  <asvg:svgBlip xmlns="" xmlns:asvg="http://schemas.microsoft.com/office/drawing/2016/SVG/main" r:embed="rId3"/>
+                  <asvg:svgBlip xmlns:asvg="http://schemas.microsoft.com/office/drawing/2016/SVG/main" xmlns="" r:embed="rId3"/>
                 </a:ext>
               </a:extLst>
             </a:blip>
@@ -1823,7 +1823,7 @@
             <a:blip r:embed="rId2">
               <a:extLst>
                 <a:ext uri="{96DAC541-7B7A-43D3-8B79-37D633B846F1}">
-                  <asvg:svgBlip xmlns="" xmlns:asvg="http://schemas.microsoft.com/office/drawing/2016/SVG/main" r:embed="rId3"/>
+                  <asvg:svgBlip xmlns:asvg="http://schemas.microsoft.com/office/drawing/2016/SVG/main" xmlns="" r:embed="rId3"/>
                 </a:ext>
               </a:extLst>
             </a:blip>
@@ -2073,7 +2073,7 @@
             <a:blip r:embed="rId2">
               <a:extLst>
                 <a:ext uri="{96DAC541-7B7A-43D3-8B79-37D633B846F1}">
-                  <asvg:svgBlip xmlns="" xmlns:asvg="http://schemas.microsoft.com/office/drawing/2016/SVG/main" r:embed="rId3"/>
+                  <asvg:svgBlip xmlns:asvg="http://schemas.microsoft.com/office/drawing/2016/SVG/main" xmlns="" r:embed="rId3"/>
                 </a:ext>
               </a:extLst>
             </a:blip>
@@ -2138,7 +2138,7 @@
             <a:blip r:embed="rId2">
               <a:extLst>
                 <a:ext uri="{96DAC541-7B7A-43D3-8B79-37D633B846F1}">
-                  <asvg:svgBlip xmlns="" xmlns:asvg="http://schemas.microsoft.com/office/drawing/2016/SVG/main" r:embed="rId3"/>
+                  <asvg:svgBlip xmlns:asvg="http://schemas.microsoft.com/office/drawing/2016/SVG/main" xmlns="" r:embed="rId3"/>
                 </a:ext>
               </a:extLst>
             </a:blip>
@@ -2492,7 +2492,7 @@
             <a:blip r:embed="rId2">
               <a:extLst>
                 <a:ext uri="{96DAC541-7B7A-43D3-8B79-37D633B846F1}">
-                  <asvg:svgBlip xmlns="" xmlns:asvg="http://schemas.microsoft.com/office/drawing/2016/SVG/main" r:embed="rId3"/>
+                  <asvg:svgBlip xmlns:asvg="http://schemas.microsoft.com/office/drawing/2016/SVG/main" xmlns="" r:embed="rId3"/>
                 </a:ext>
               </a:extLst>
             </a:blip>
@@ -2780,7 +2780,7 @@
             <a:blip r:embed="rId2">
               <a:extLst>
                 <a:ext uri="{96DAC541-7B7A-43D3-8B79-37D633B846F1}">
-                  <asvg:svgBlip xmlns="" xmlns:asvg="http://schemas.microsoft.com/office/drawing/2016/SVG/main" r:embed="rId3"/>
+                  <asvg:svgBlip xmlns:asvg="http://schemas.microsoft.com/office/drawing/2016/SVG/main" xmlns="" r:embed="rId3"/>
                 </a:ext>
               </a:extLst>
             </a:blip>
@@ -3062,7 +3062,7 @@
             <a:blip r:embed="rId2">
               <a:extLst>
                 <a:ext uri="{96DAC541-7B7A-43D3-8B79-37D633B846F1}">
-                  <asvg:svgBlip xmlns="" xmlns:asvg="http://schemas.microsoft.com/office/drawing/2016/SVG/main" r:embed="rId3"/>
+                  <asvg:svgBlip xmlns:asvg="http://schemas.microsoft.com/office/drawing/2016/SVG/main" xmlns="" r:embed="rId3"/>
                 </a:ext>
               </a:extLst>
             </a:blip>
@@ -7050,11 +7050,7 @@
             </a:r>
             <a:r>
               <a:rPr lang="en-US" sz="2000" dirty="0"/>
-              <a:t>Identify stakeholders </a:t>
-            </a:r>
-            <a:r>
-              <a:rPr lang="en-US" sz="2000" dirty="0"/>
-              <a:t>    </a:t>
+              <a:t>Identify stakeholders     </a:t>
             </a:r>
             <a:r>
               <a:rPr lang="en-US" sz="2000" dirty="0" smtClean="0"/>
@@ -7062,11 +7058,7 @@
             </a:r>
             <a:r>
               <a:rPr lang="en-US" sz="2000" dirty="0"/>
-              <a:t>Define </a:t>
-            </a:r>
-            <a:r>
-              <a:rPr lang="en-US" sz="2000" dirty="0"/>
-              <a:t>requirements</a:t>
+              <a:t>Define requirements</a:t>
             </a:r>
           </a:p>
           <a:p>
@@ -7086,19 +7078,7 @@
             </a:pPr>
             <a:r>
               <a:rPr lang="en-US" sz="2000" dirty="0"/>
-              <a:t>v1.1.3 </a:t>
-            </a:r>
-            <a:r>
-              <a:rPr lang="en-US" sz="2000" dirty="0"/>
-              <a:t>Develop project </a:t>
-            </a:r>
-            <a:r>
-              <a:rPr lang="en-US" sz="2000" dirty="0"/>
-              <a:t>plan         v1.1.4 </a:t>
-            </a:r>
-            <a:r>
-              <a:rPr lang="en-US" sz="2000" dirty="0"/>
-              <a:t>Design database </a:t>
+              <a:t>v1.1.3 Develop project plan         v1.1.4 Design database </a:t>
             </a:r>
             <a:r>
               <a:rPr lang="en-US" sz="2000" dirty="0" smtClean="0"/>
@@ -14124,16 +14104,30 @@
             <a:pPr marL="0" lvl="1" indent="0">
               <a:buNone/>
             </a:pPr>
-            <a:r>
-              <a:rPr lang="en-US" sz="1800" dirty="0">
-                <a:highlight>
-                  <a:srgbClr val="FFFF00"/>
-                </a:highlight>
-                <a:ea typeface="+mn-lt"/>
-                <a:cs typeface="+mn-lt"/>
-              </a:rPr>
-              <a:t>[Add a chart showing patient age categories with a brief caption.]</a:t>
-            </a:r>
+            <a:endParaRPr lang="en-US" sz="1800" dirty="0">
+              <a:highlight>
+                <a:srgbClr val="FFFF00"/>
+              </a:highlight>
+              <a:ea typeface="+mn-lt"/>
+              <a:cs typeface="+mn-lt"/>
+            </a:endParaRPr>
+          </a:p>
+          <a:p>
+            <a:pPr marL="0" lvl="1" indent="0">
+              <a:buNone/>
+            </a:pPr>
+            <a:endParaRPr lang="en-US" sz="1800" dirty="0" smtClean="0">
+              <a:highlight>
+                <a:srgbClr val="FFFF00"/>
+              </a:highlight>
+              <a:ea typeface="+mn-lt"/>
+              <a:cs typeface="+mn-lt"/>
+            </a:endParaRPr>
+          </a:p>
+          <a:p>
+            <a:pPr marL="0" lvl="1" indent="0">
+              <a:buNone/>
+            </a:pPr>
             <a:endParaRPr lang="en-US" sz="1800" dirty="0">
               <a:highlight>
                 <a:srgbClr val="FFFF00"/>
@@ -14143,6 +14137,36 @@
           </a:p>
         </p:txBody>
       </p:sp>
+      <p:pic>
+        <p:nvPicPr>
+          <p:cNvPr id="2" name="Picture 1"/>
+          <p:cNvPicPr>
+            <a:picLocks noChangeAspect="1"/>
+          </p:cNvPicPr>
+          <p:nvPr/>
+        </p:nvPicPr>
+        <p:blipFill>
+          <a:blip r:embed="rId2">
+            <a:extLst>
+              <a:ext uri="{28A0092B-C50C-407E-A947-70E740481C1C}">
+                <a14:useLocalDpi xmlns:a14="http://schemas.microsoft.com/office/drawing/2010/main" val="0"/>
+              </a:ext>
+            </a:extLst>
+          </a:blip>
+          <a:stretch>
+            <a:fillRect/>
+          </a:stretch>
+        </p:blipFill>
+        <p:spPr>
+          <a:xfrm>
+            <a:off x="1836919" y="1791203"/>
+            <a:ext cx="8924562" cy="4352553"/>
+          </a:xfrm>
+          <a:prstGeom prst="rect">
+            <a:avLst/>
+          </a:prstGeom>
+        </p:spPr>
+      </p:pic>
     </p:spTree>
     <p:extLst>
       <p:ext uri="{BB962C8B-B14F-4D97-AF65-F5344CB8AC3E}">
@@ -14436,16 +14460,30 @@
             <a:pPr marL="0" indent="0">
               <a:buNone/>
             </a:pPr>
-            <a:r>
-              <a:rPr lang="en-US" sz="1800" dirty="0">
-                <a:highlight>
-                  <a:srgbClr val="FFFF00"/>
-                </a:highlight>
-                <a:ea typeface="+mn-lt"/>
-                <a:cs typeface="+mn-lt"/>
-              </a:rPr>
-              <a:t>[Insert a chart showing balances by account type with a caption.]</a:t>
-            </a:r>
+            <a:endParaRPr lang="en-US" sz="1800" dirty="0">
+              <a:highlight>
+                <a:srgbClr val="FFFF00"/>
+              </a:highlight>
+              <a:ea typeface="+mn-lt"/>
+              <a:cs typeface="+mn-lt"/>
+            </a:endParaRPr>
+          </a:p>
+          <a:p>
+            <a:pPr marL="0" indent="0">
+              <a:buNone/>
+            </a:pPr>
+            <a:endParaRPr lang="en-US" sz="1800" dirty="0" smtClean="0">
+              <a:highlight>
+                <a:srgbClr val="FFFF00"/>
+              </a:highlight>
+              <a:ea typeface="+mn-lt"/>
+              <a:cs typeface="+mn-lt"/>
+            </a:endParaRPr>
+          </a:p>
+          <a:p>
+            <a:pPr marL="0" indent="0">
+              <a:buNone/>
+            </a:pPr>
             <a:endParaRPr lang="en-US" sz="1800" dirty="0">
               <a:highlight>
                 <a:srgbClr val="FFFF00"/>
@@ -14455,6 +14493,36 @@
           </a:p>
         </p:txBody>
       </p:sp>
+      <p:pic>
+        <p:nvPicPr>
+          <p:cNvPr id="2" name="Picture 1"/>
+          <p:cNvPicPr>
+            <a:picLocks noChangeAspect="1"/>
+          </p:cNvPicPr>
+          <p:nvPr/>
+        </p:nvPicPr>
+        <p:blipFill>
+          <a:blip r:embed="rId2">
+            <a:extLst>
+              <a:ext uri="{28A0092B-C50C-407E-A947-70E740481C1C}">
+                <a14:useLocalDpi xmlns:a14="http://schemas.microsoft.com/office/drawing/2010/main" val="0"/>
+              </a:ext>
+            </a:extLst>
+          </a:blip>
+          <a:stretch>
+            <a:fillRect/>
+          </a:stretch>
+        </p:blipFill>
+        <p:spPr>
+          <a:xfrm>
+            <a:off x="1461640" y="1679443"/>
+            <a:ext cx="8924562" cy="4352553"/>
+          </a:xfrm>
+          <a:prstGeom prst="rect">
+            <a:avLst/>
+          </a:prstGeom>
+        </p:spPr>
+      </p:pic>
     </p:spTree>
     <p:extLst>
       <p:ext uri="{BB962C8B-B14F-4D97-AF65-F5344CB8AC3E}">
@@ -14561,6 +14629,67 @@
             </a:r>
           </a:p>
           <a:p>
+            <a:pPr marL="0" indent="0">
+              <a:buNone/>
+            </a:pPr>
+            <a:r>
+              <a:rPr lang="en-US" sz="2400" dirty="0" smtClean="0"/>
+              <a:t>	XYZ </a:t>
+            </a:r>
+            <a:r>
+              <a:rPr lang="en-US" sz="2400" dirty="0"/>
+              <a:t>Health </a:t>
+            </a:r>
+            <a:r>
+              <a:rPr lang="en-US" sz="2400" dirty="0" smtClean="0"/>
+              <a:t>Solutions</a:t>
+            </a:r>
+            <a:r>
+              <a:rPr lang="en-US" sz="2400" dirty="0"/>
+              <a:t>, a mid-sized healthcare provider facing challenges due to fragmented systems </a:t>
+            </a:r>
+            <a:r>
+              <a:rPr lang="en-US" sz="2400" dirty="0" smtClean="0"/>
+              <a:t>for </a:t>
+            </a:r>
+            <a:r>
+              <a:rPr lang="en-US" sz="2400" dirty="0"/>
+              <a:t>managing patient records, appointment scheduling, and billing. </a:t>
+            </a:r>
+          </a:p>
+          <a:p>
+            <a:pPr marL="457200" indent="-457200">
+              <a:spcBef>
+                <a:spcPts val="600"/>
+              </a:spcBef>
+              <a:buFont typeface="+mj-lt"/>
+              <a:buAutoNum type="arabicPeriod"/>
+            </a:pPr>
+            <a:endParaRPr lang="en-US" sz="2400" dirty="0">
+              <a:cs typeface="Arial" panose="020B0604020202020204" pitchFamily="34" charset="0"/>
+            </a:endParaRPr>
+          </a:p>
+          <a:p>
+            <a:pPr marL="0" indent="0">
+              <a:spcBef>
+                <a:spcPts val="600"/>
+              </a:spcBef>
+              <a:buNone/>
+            </a:pPr>
+            <a:r>
+              <a:rPr lang="en-US" sz="2400" b="1" dirty="0" smtClean="0">
+                <a:cs typeface="Arial" panose="020B0604020202020204" pitchFamily="34" charset="0"/>
+              </a:rPr>
+              <a:t>Key </a:t>
+            </a:r>
+            <a:r>
+              <a:rPr lang="en-US" sz="2400" b="1" dirty="0">
+                <a:cs typeface="Arial" panose="020B0604020202020204" pitchFamily="34" charset="0"/>
+              </a:rPr>
+              <a:t>insights:</a:t>
+            </a:r>
+          </a:p>
+          <a:p>
             <a:pPr marL="457200" indent="-457200">
               <a:spcBef>
                 <a:spcPts val="600"/>
@@ -14576,6 +14705,21 @@
             </a:r>
           </a:p>
           <a:p>
+            <a:pPr marL="457200" indent="-457200">
+              <a:spcBef>
+                <a:spcPts val="600"/>
+              </a:spcBef>
+              <a:buFont typeface="+mj-lt"/>
+              <a:buAutoNum type="arabicPeriod"/>
+            </a:pPr>
+            <a:r>
+              <a:rPr lang="en-US" sz="2400" dirty="0">
+                <a:cs typeface="Arial" panose="020B0604020202020204" pitchFamily="34" charset="0"/>
+              </a:rPr>
+              <a:t> </a:t>
+            </a:r>
+          </a:p>
+          <a:p>
             <a:pPr>
               <a:spcBef>
                 <a:spcPts val="600"/>
@@ -14586,16 +14730,6 @@
             </a:endParaRPr>
           </a:p>
           <a:p>
-            <a:pPr>
-              <a:spcBef>
-                <a:spcPts val="600"/>
-              </a:spcBef>
-            </a:pPr>
-            <a:endParaRPr lang="en-US" sz="2400" dirty="0">
-              <a:cs typeface="Arial" panose="020B0604020202020204" pitchFamily="34" charset="0"/>
-            </a:endParaRPr>
-          </a:p>
-          <a:p>
             <a:pPr marL="0" indent="0">
               <a:spcBef>
                 <a:spcPts val="600"/>
@@ -14606,7 +14740,7 @@
               <a:rPr lang="en-US" sz="2400" b="1" dirty="0">
                 <a:cs typeface="Arial" panose="020B0604020202020204" pitchFamily="34" charset="0"/>
               </a:rPr>
-              <a:t>Key insights:</a:t>
+              <a:t>Recommended actions:</a:t>
             </a:r>
           </a:p>
           <a:p>
@@ -14633,76 +14767,7 @@
               <a:buAutoNum type="arabicPeriod"/>
             </a:pPr>
             <a:r>
-              <a:rPr lang="en-US" sz="2400" dirty="0">
-                <a:cs typeface="Arial" panose="020B0604020202020204" pitchFamily="34" charset="0"/>
-              </a:rPr>
-              <a:t> </a:t>
-            </a:r>
-          </a:p>
-          <a:p>
-            <a:pPr>
-              <a:spcBef>
-                <a:spcPts val="600"/>
-              </a:spcBef>
-            </a:pPr>
-            <a:endParaRPr lang="en-US" sz="2400" dirty="0">
-              <a:cs typeface="Arial" panose="020B0604020202020204" pitchFamily="34" charset="0"/>
-            </a:endParaRPr>
-          </a:p>
-          <a:p>
-            <a:pPr marL="0" indent="0">
-              <a:spcBef>
-                <a:spcPts val="600"/>
-              </a:spcBef>
-              <a:buNone/>
-            </a:pPr>
-            <a:r>
-              <a:rPr lang="en-US" sz="2400" b="1" dirty="0">
-                <a:cs typeface="Arial" panose="020B0604020202020204" pitchFamily="34" charset="0"/>
-              </a:rPr>
-              <a:t>Recommended actions:</a:t>
-            </a:r>
-          </a:p>
-          <a:p>
-            <a:pPr marL="457200" indent="-457200">
-              <a:spcBef>
-                <a:spcPts val="600"/>
-              </a:spcBef>
-              <a:buFont typeface="+mj-lt"/>
-              <a:buAutoNum type="arabicPeriod"/>
-            </a:pPr>
-            <a:r>
-              <a:rPr lang="en-US" sz="2400" dirty="0">
-                <a:cs typeface="Arial" panose="020B0604020202020204" pitchFamily="34" charset="0"/>
-              </a:rPr>
-              <a:t> </a:t>
-            </a:r>
-          </a:p>
-          <a:p>
-            <a:pPr marL="457200" indent="-457200">
-              <a:spcBef>
-                <a:spcPts val="600"/>
-              </a:spcBef>
-              <a:buFont typeface="+mj-lt"/>
-              <a:buAutoNum type="arabicPeriod"/>
-            </a:pPr>
-            <a:r>
-              <a:rPr lang="en-US" sz="2400" dirty="0">
-                <a:cs typeface="Arial" panose="020B0604020202020204" pitchFamily="34" charset="0"/>
-              </a:rPr>
-              <a:t> </a:t>
-            </a:r>
-          </a:p>
-          <a:p>
-            <a:pPr marL="457200" indent="-457200">
-              <a:spcBef>
-                <a:spcPts val="600"/>
-              </a:spcBef>
-              <a:buFont typeface="+mj-lt"/>
-              <a:buAutoNum type="arabicPeriod"/>
-            </a:pPr>
-            <a:r>
-              <a:rPr lang="en-US" sz="2400" dirty="0">
+              <a:rPr lang="en-US" sz="2400" dirty="0" smtClean="0">
                 <a:cs typeface="Arial" panose="020B0604020202020204" pitchFamily="34" charset="0"/>
               </a:rPr>
               <a:t> </a:t>
@@ -15003,16 +15068,6 @@
             <a:pPr marL="0" indent="0">
               <a:buNone/>
             </a:pPr>
-            <a:r>
-              <a:rPr lang="en-US" sz="1800" dirty="0">
-                <a:highlight>
-                  <a:srgbClr val="FFFF00"/>
-                </a:highlight>
-                <a:ea typeface="+mn-lt"/>
-                <a:cs typeface="+mn-lt"/>
-              </a:rPr>
-              <a:t>[Include a chart showing representation across locations with a caption.]</a:t>
-            </a:r>
             <a:endParaRPr lang="en-US" sz="1800" dirty="0">
               <a:highlight>
                 <a:srgbClr val="FFFF00"/>
@@ -15022,6 +15077,36 @@
           </a:p>
         </p:txBody>
       </p:sp>
+      <p:pic>
+        <p:nvPicPr>
+          <p:cNvPr id="2" name="Picture 1"/>
+          <p:cNvPicPr>
+            <a:picLocks noChangeAspect="1"/>
+          </p:cNvPicPr>
+          <p:nvPr/>
+        </p:nvPicPr>
+        <p:blipFill>
+          <a:blip r:embed="rId2">
+            <a:extLst>
+              <a:ext uri="{28A0092B-C50C-407E-A947-70E740481C1C}">
+                <a14:useLocalDpi xmlns:a14="http://schemas.microsoft.com/office/drawing/2010/main" val="0"/>
+              </a:ext>
+            </a:extLst>
+          </a:blip>
+          <a:stretch>
+            <a:fillRect/>
+          </a:stretch>
+        </p:blipFill>
+        <p:spPr>
+          <a:xfrm>
+            <a:off x="4657126" y="284480"/>
+            <a:ext cx="6738547" cy="6106160"/>
+          </a:xfrm>
+          <a:prstGeom prst="rect">
+            <a:avLst/>
+          </a:prstGeom>
+        </p:spPr>
+      </p:pic>
     </p:spTree>
     <p:extLst>
       <p:ext uri="{BB962C8B-B14F-4D97-AF65-F5344CB8AC3E}">
@@ -15299,34 +15384,16 @@
               <a:buNone/>
             </a:pPr>
             <a:r>
-              <a:rPr lang="en-US" sz="2400" b="1"/>
+              <a:rPr lang="en-US" sz="2400" b="1" dirty="0"/>
               <a:t>Monthly Appointment Volume</a:t>
             </a:r>
-            <a:endParaRPr lang="en-US"/>
+            <a:endParaRPr lang="en-US" dirty="0"/>
           </a:p>
           <a:p>
             <a:pPr marL="0" indent="0">
               <a:buFont typeface="Arial" panose="020B0604020202020204" pitchFamily="34" charset="0"/>
               <a:buNone/>
             </a:pPr>
-            <a:r>
-              <a:rPr lang="en-US" sz="1800" dirty="0">
-                <a:highlight>
-                  <a:srgbClr val="FFFF00"/>
-                </a:highlight>
-              </a:rPr>
-              <a:t>[Insert</a:t>
-            </a:r>
-            <a:r>
-              <a:rPr lang="en-US" sz="1800" dirty="0">
-                <a:highlight>
-                  <a:srgbClr val="FFFF00"/>
-                </a:highlight>
-                <a:ea typeface="+mn-lt"/>
-                <a:cs typeface="+mn-lt"/>
-              </a:rPr>
-              <a:t> a chart displaying monthly appointment counts with a caption.]</a:t>
-            </a:r>
             <a:endParaRPr lang="en-US" sz="1800" dirty="0">
               <a:highlight>
                 <a:srgbClr val="FFFF00"/>
@@ -15339,7 +15406,7 @@
               <a:buFont typeface="Arial"/>
               <a:buChar char="•"/>
             </a:pPr>
-            <a:endParaRPr lang="en-US"/>
+            <a:endParaRPr lang="en-US" dirty="0"/>
           </a:p>
           <a:p>
             <a:pPr marL="0" indent="0">
@@ -15351,6 +15418,36 @@
           </a:p>
         </p:txBody>
       </p:sp>
+      <p:pic>
+        <p:nvPicPr>
+          <p:cNvPr id="2" name="Picture 1"/>
+          <p:cNvPicPr>
+            <a:picLocks noChangeAspect="1"/>
+          </p:cNvPicPr>
+          <p:nvPr/>
+        </p:nvPicPr>
+        <p:blipFill>
+          <a:blip r:embed="rId2" cstate="print">
+            <a:extLst>
+              <a:ext uri="{28A0092B-C50C-407E-A947-70E740481C1C}">
+                <a14:useLocalDpi xmlns:a14="http://schemas.microsoft.com/office/drawing/2010/main" val="0"/>
+              </a:ext>
+            </a:extLst>
+          </a:blip>
+          <a:stretch>
+            <a:fillRect/>
+          </a:stretch>
+        </p:blipFill>
+        <p:spPr>
+          <a:xfrm>
+            <a:off x="0" y="1795534"/>
+            <a:ext cx="12192000" cy="3998452"/>
+          </a:xfrm>
+          <a:prstGeom prst="rect">
+            <a:avLst/>
+          </a:prstGeom>
+        </p:spPr>
+      </p:pic>
     </p:spTree>
     <p:extLst>
       <p:ext uri="{BB962C8B-B14F-4D97-AF65-F5344CB8AC3E}">
@@ -15636,16 +15733,18 @@
             <a:pPr marL="0" indent="0">
               <a:buNone/>
             </a:pPr>
-            <a:r>
-              <a:rPr lang="en-US" sz="1800" dirty="0">
-                <a:highlight>
-                  <a:srgbClr val="FFFF00"/>
-                </a:highlight>
-                <a:ea typeface="+mn-lt"/>
-                <a:cs typeface="+mn-lt"/>
-              </a:rPr>
-              <a:t>[Show a chart of appointments by type with a caption.]</a:t>
-            </a:r>
+            <a:endParaRPr lang="en-US" sz="1800" dirty="0">
+              <a:highlight>
+                <a:srgbClr val="FFFF00"/>
+              </a:highlight>
+              <a:ea typeface="+mn-lt"/>
+              <a:cs typeface="+mn-lt"/>
+            </a:endParaRPr>
+          </a:p>
+          <a:p>
+            <a:pPr marL="0" indent="0">
+              <a:buNone/>
+            </a:pPr>
             <a:endParaRPr lang="en-US" sz="1800" dirty="0">
               <a:highlight>
                 <a:srgbClr val="FFFF00"/>
@@ -15655,6 +15754,36 @@
           </a:p>
         </p:txBody>
       </p:sp>
+      <p:pic>
+        <p:nvPicPr>
+          <p:cNvPr id="2" name="Picture 1"/>
+          <p:cNvPicPr>
+            <a:picLocks noChangeAspect="1"/>
+          </p:cNvPicPr>
+          <p:nvPr/>
+        </p:nvPicPr>
+        <p:blipFill>
+          <a:blip r:embed="rId2">
+            <a:extLst>
+              <a:ext uri="{28A0092B-C50C-407E-A947-70E740481C1C}">
+                <a14:useLocalDpi xmlns:a14="http://schemas.microsoft.com/office/drawing/2010/main" val="0"/>
+              </a:ext>
+            </a:extLst>
+          </a:blip>
+          <a:stretch>
+            <a:fillRect/>
+          </a:stretch>
+        </p:blipFill>
+        <p:spPr>
+          <a:xfrm>
+            <a:off x="5628634" y="1452262"/>
+            <a:ext cx="5303531" cy="4498857"/>
+          </a:xfrm>
+          <a:prstGeom prst="rect">
+            <a:avLst/>
+          </a:prstGeom>
+        </p:spPr>
+      </p:pic>
     </p:spTree>
     <p:extLst>
       <p:ext uri="{BB962C8B-B14F-4D97-AF65-F5344CB8AC3E}">
@@ -15932,7 +16061,7 @@
               <a:buNone/>
             </a:pPr>
             <a:r>
-              <a:rPr lang="en-US" sz="2400" b="1"/>
+              <a:rPr lang="en-US" sz="2400" b="1" dirty="0"/>
               <a:t>Average Appointment Fee by Month</a:t>
             </a:r>
             <a:endParaRPr lang="en-US" dirty="0"/>
@@ -15941,24 +16070,6 @@
             <a:pPr marL="0" indent="0">
               <a:buNone/>
             </a:pPr>
-            <a:r>
-              <a:rPr lang="en-US" sz="1800" dirty="0">
-                <a:highlight>
-                  <a:srgbClr val="FFFF00"/>
-                </a:highlight>
-              </a:rPr>
-              <a:t>[Insert</a:t>
-            </a:r>
-            <a:r>
-              <a:rPr lang="en-US" sz="1800" dirty="0">
-                <a:highlight>
-                  <a:srgbClr val="FFFF00"/>
-                </a:highlight>
-                <a:ea typeface="+mn-lt"/>
-                <a:cs typeface="+mn-lt"/>
-              </a:rPr>
-              <a:t> a chart showing monthly average fees with a caption.]</a:t>
-            </a:r>
             <a:endParaRPr lang="en-US" sz="1800" dirty="0">
               <a:highlight>
                 <a:srgbClr val="FFFF00"/>
@@ -15968,6 +16079,36 @@
           </a:p>
         </p:txBody>
       </p:sp>
+      <p:pic>
+        <p:nvPicPr>
+          <p:cNvPr id="2" name="Picture 1"/>
+          <p:cNvPicPr>
+            <a:picLocks noChangeAspect="1"/>
+          </p:cNvPicPr>
+          <p:nvPr/>
+        </p:nvPicPr>
+        <p:blipFill>
+          <a:blip r:embed="rId2">
+            <a:extLst>
+              <a:ext uri="{28A0092B-C50C-407E-A947-70E740481C1C}">
+                <a14:useLocalDpi xmlns:a14="http://schemas.microsoft.com/office/drawing/2010/main" val="0"/>
+              </a:ext>
+            </a:extLst>
+          </a:blip>
+          <a:stretch>
+            <a:fillRect/>
+          </a:stretch>
+        </p:blipFill>
+        <p:spPr>
+          <a:xfrm>
+            <a:off x="1704839" y="1811523"/>
+            <a:ext cx="8924562" cy="4352553"/>
+          </a:xfrm>
+          <a:prstGeom prst="rect">
+            <a:avLst/>
+          </a:prstGeom>
+        </p:spPr>
+      </p:pic>
     </p:spTree>
     <p:extLst>
       <p:ext uri="{BB962C8B-B14F-4D97-AF65-F5344CB8AC3E}">
@@ -16254,16 +16395,6 @@
             <a:pPr marL="0" indent="0">
               <a:buNone/>
             </a:pPr>
-            <a:r>
-              <a:rPr lang="en-US" sz="1800" dirty="0">
-                <a:highlight>
-                  <a:srgbClr val="FFFF00"/>
-                </a:highlight>
-                <a:ea typeface="+mn-lt"/>
-                <a:cs typeface="+mn-lt"/>
-              </a:rPr>
-              <a:t>[Add a visual highlighting the average patient age by branch.]</a:t>
-            </a:r>
             <a:endParaRPr lang="en-US" sz="1800" dirty="0">
               <a:highlight>
                 <a:srgbClr val="FFFF00"/>
@@ -16567,19 +16698,58 @@
             <a:pPr marL="0" indent="0">
               <a:buNone/>
             </a:pPr>
-            <a:r>
-              <a:rPr lang="en-US" sz="1800" dirty="0">
-                <a:highlight>
-                  <a:srgbClr val="FFFF00"/>
-                </a:highlight>
-                <a:ea typeface="+mn-lt"/>
-                <a:cs typeface="+mn-lt"/>
-              </a:rPr>
-              <a:t>[Insert a visual showing appointment counts by location.]</a:t>
-            </a:r>
+            <a:endParaRPr lang="en-US" sz="1800" dirty="0">
+              <a:highlight>
+                <a:srgbClr val="FFFF00"/>
+              </a:highlight>
+              <a:ea typeface="+mn-lt"/>
+              <a:cs typeface="+mn-lt"/>
+            </a:endParaRPr>
+          </a:p>
+          <a:p>
+            <a:pPr marL="0" indent="0">
+              <a:buNone/>
+            </a:pPr>
+            <a:endParaRPr lang="en-US" sz="1800" dirty="0">
+              <a:highlight>
+                <a:srgbClr val="FFFF00"/>
+              </a:highlight>
+              <a:ea typeface="+mn-lt"/>
+              <a:cs typeface="+mn-lt"/>
+            </a:endParaRPr>
           </a:p>
         </p:txBody>
       </p:sp>
+      <p:pic>
+        <p:nvPicPr>
+          <p:cNvPr id="2" name="Picture 1"/>
+          <p:cNvPicPr>
+            <a:picLocks noChangeAspect="1"/>
+          </p:cNvPicPr>
+          <p:nvPr/>
+        </p:nvPicPr>
+        <p:blipFill>
+          <a:blip r:embed="rId2">
+            <a:extLst>
+              <a:ext uri="{28A0092B-C50C-407E-A947-70E740481C1C}">
+                <a14:useLocalDpi xmlns:a14="http://schemas.microsoft.com/office/drawing/2010/main" val="0"/>
+              </a:ext>
+            </a:extLst>
+          </a:blip>
+          <a:stretch>
+            <a:fillRect/>
+          </a:stretch>
+        </p:blipFill>
+        <p:spPr>
+          <a:xfrm>
+            <a:off x="471487" y="1714500"/>
+            <a:ext cx="11249025" cy="3429000"/>
+          </a:xfrm>
+          <a:prstGeom prst="rect">
+            <a:avLst/>
+          </a:prstGeom>
+        </p:spPr>
+      </p:pic>
     </p:spTree>
     <p:extLst>
       <p:ext uri="{BB962C8B-B14F-4D97-AF65-F5344CB8AC3E}">
@@ -18026,13 +18196,13 @@
               <a:buNone/>
             </a:pPr>
             <a:r>
-              <a:rPr lang="en-US" sz="2400" b="1" dirty="0" smtClean="0">
+              <a:rPr lang="en-US" sz="2000" b="1" dirty="0" smtClean="0">
                 <a:cs typeface="Arial" panose="020B0604020202020204" pitchFamily="34" charset="0"/>
               </a:rPr>
               <a:t>Opportunity</a:t>
             </a:r>
             <a:r>
-              <a:rPr lang="en-US" sz="2400" b="1" dirty="0">
+              <a:rPr lang="en-US" sz="2000" b="1" dirty="0">
                 <a:cs typeface="Arial" panose="020B0604020202020204" pitchFamily="34" charset="0"/>
               </a:rPr>
               <a:t>:</a:t>
@@ -18043,7 +18213,7 @@
               <a:buNone/>
             </a:pPr>
             <a:r>
-              <a:rPr lang="en-US" sz="2400" b="1" dirty="0">
+              <a:rPr lang="en-US" sz="2000" b="1" dirty="0">
                 <a:cs typeface="Arial" panose="020B0604020202020204" pitchFamily="34" charset="0"/>
               </a:rPr>
               <a:t>1. </a:t>
@@ -18054,26 +18224,27 @@
               <a:buNone/>
             </a:pPr>
             <a:r>
-              <a:rPr lang="en-US" sz="2400" b="1" dirty="0">
+              <a:rPr lang="en-US" sz="2000" b="1" dirty="0">
                 <a:cs typeface="Arial" panose="020B0604020202020204" pitchFamily="34" charset="0"/>
               </a:rPr>
               <a:t>2.</a:t>
             </a:r>
           </a:p>
           <a:p>
-            <a:endParaRPr lang="en-US" sz="2400" b="1" dirty="0">
-              <a:cs typeface="Arial" panose="020B0604020202020204" pitchFamily="34" charset="0"/>
-            </a:endParaRPr>
-          </a:p>
-          <a:p>
             <a:pPr marL="0" indent="0">
               <a:buNone/>
             </a:pPr>
             <a:r>
-              <a:rPr lang="en-US" sz="2400" b="1" dirty="0">
+              <a:rPr lang="en-US" sz="2000" b="1" dirty="0" smtClean="0">
                 <a:cs typeface="Arial" panose="020B0604020202020204" pitchFamily="34" charset="0"/>
               </a:rPr>
-              <a:t>Approach:</a:t>
+              <a:t>Approach</a:t>
+            </a:r>
+            <a:r>
+              <a:rPr lang="en-US" sz="2000" b="1" dirty="0">
+                <a:cs typeface="Arial" panose="020B0604020202020204" pitchFamily="34" charset="0"/>
+              </a:rPr>
+              <a:t>:</a:t>
             </a:r>
           </a:p>
           <a:p>
@@ -18081,25 +18252,60 @@
               <a:buNone/>
             </a:pPr>
             <a:r>
-              <a:rPr lang="en-US" sz="2400" b="1" dirty="0">
+              <a:rPr lang="en-US" sz="2000" b="1" dirty="0">
                 <a:cs typeface="Arial" panose="020B0604020202020204" pitchFamily="34" charset="0"/>
               </a:rPr>
-              <a:t>1.</a:t>
-            </a:r>
+              <a:t>1</a:t>
+            </a:r>
+            <a:r>
+              <a:rPr lang="en-US" sz="2000" b="1" dirty="0" smtClean="0">
+                <a:cs typeface="Arial" panose="020B0604020202020204" pitchFamily="34" charset="0"/>
+              </a:rPr>
+              <a:t>. </a:t>
+            </a:r>
+            <a:r>
+              <a:rPr lang="en-US" sz="2000" dirty="0">
+                <a:cs typeface="Arial" panose="020B0604020202020204" pitchFamily="34" charset="0"/>
+              </a:rPr>
+              <a:t>C</a:t>
+            </a:r>
+            <a:r>
+              <a:rPr lang="en-US" sz="2000" dirty="0" smtClean="0"/>
+              <a:t>onsolidate </a:t>
+            </a:r>
+            <a:r>
+              <a:rPr lang="en-US" sz="2000" dirty="0"/>
+              <a:t>patient records, appointment scheduling, and billing across multiple clinic locations, while improving patient satisfaction by 20% and maintaining full HIPAA compliance.</a:t>
+            </a:r>
+            <a:endParaRPr lang="en-US" sz="2000" b="1" dirty="0">
+              <a:cs typeface="Arial" panose="020B0604020202020204" pitchFamily="34" charset="0"/>
+            </a:endParaRPr>
           </a:p>
           <a:p>
             <a:pPr marL="0" indent="0">
               <a:buNone/>
             </a:pPr>
             <a:r>
-              <a:rPr lang="en-US" sz="2400" b="1" dirty="0">
+              <a:rPr lang="en-US" sz="2000" b="1" dirty="0">
                 <a:cs typeface="Arial" panose="020B0604020202020204" pitchFamily="34" charset="0"/>
               </a:rPr>
-              <a:t>2.</a:t>
-            </a:r>
-          </a:p>
-          <a:p>
-            <a:endParaRPr lang="en-US" sz="2400" b="1" dirty="0">
+              <a:t>2</a:t>
+            </a:r>
+            <a:r>
+              <a:rPr lang="en-US" sz="2000" b="1" dirty="0" smtClean="0">
+                <a:cs typeface="Arial" panose="020B0604020202020204" pitchFamily="34" charset="0"/>
+              </a:rPr>
+              <a:t>. </a:t>
+            </a:r>
+            <a:r>
+              <a:rPr lang="en-US" sz="2000" dirty="0" smtClean="0"/>
+              <a:t>Aligning </a:t>
+            </a:r>
+            <a:r>
+              <a:rPr lang="en-US" sz="2000" dirty="0"/>
+              <a:t>CI/CD pipeline design and monitoring strategies with business goals, system reliability, and HIPAA compliance requirements.</a:t>
+            </a:r>
+            <a:endParaRPr lang="en-US" sz="2000" b="1" dirty="0">
               <a:cs typeface="Arial" panose="020B0604020202020204" pitchFamily="34" charset="0"/>
             </a:endParaRPr>
           </a:p>
@@ -18108,10 +18314,16 @@
               <a:buNone/>
             </a:pPr>
             <a:r>
-              <a:rPr lang="en-US" sz="2400" b="1" dirty="0">
+              <a:rPr lang="en-US" sz="2000" b="1" dirty="0" smtClean="0">
                 <a:cs typeface="Arial" panose="020B0604020202020204" pitchFamily="34" charset="0"/>
               </a:rPr>
-              <a:t>Key questions/hypotheses:</a:t>
+              <a:t>Key </a:t>
+            </a:r>
+            <a:r>
+              <a:rPr lang="en-US" sz="2000" b="1" dirty="0">
+                <a:cs typeface="Arial" panose="020B0604020202020204" pitchFamily="34" charset="0"/>
+              </a:rPr>
+              <a:t>questions/hypotheses:</a:t>
             </a:r>
           </a:p>
           <a:p>
@@ -18119,18 +18331,27 @@
               <a:buNone/>
             </a:pPr>
             <a:r>
-              <a:rPr lang="en-US" sz="2400" b="1" dirty="0">
+              <a:rPr lang="en-US" sz="2000" b="1" dirty="0">
                 <a:cs typeface="Arial" panose="020B0604020202020204" pitchFamily="34" charset="0"/>
               </a:rPr>
-              <a:t>1.</a:t>
-            </a:r>
+              <a:t>1</a:t>
+            </a:r>
+            <a:r>
+              <a:rPr lang="en-US" sz="2000" b="1" dirty="0" smtClean="0">
+                <a:cs typeface="Arial" panose="020B0604020202020204" pitchFamily="34" charset="0"/>
+              </a:rPr>
+              <a:t>. </a:t>
+            </a:r>
+            <a:endParaRPr lang="en-US" sz="2000" b="1" dirty="0">
+              <a:cs typeface="Arial" panose="020B0604020202020204" pitchFamily="34" charset="0"/>
+            </a:endParaRPr>
           </a:p>
           <a:p>
             <a:pPr marL="0" indent="0">
               <a:buNone/>
             </a:pPr>
             <a:r>
-              <a:rPr lang="en-US" sz="2400" b="1" dirty="0">
+              <a:rPr lang="en-US" sz="2000" b="1" dirty="0">
                 <a:cs typeface="Arial" panose="020B0604020202020204" pitchFamily="34" charset="0"/>
               </a:rPr>
               <a:t>2.</a:t>
@@ -21917,11 +22138,14 @@
               <a:rPr lang="en-US" sz="1800" dirty="0" smtClean="0">
                 <a:cs typeface="Arial" panose="020B0604020202020204" pitchFamily="34" charset="0"/>
               </a:rPr>
-              <a:t> </a:t>
-            </a:r>
-            <a:endParaRPr lang="en-US" sz="1800" dirty="0">
-              <a:cs typeface="Arial" panose="020B0604020202020204" pitchFamily="34" charset="0"/>
-            </a:endParaRPr>
+              <a:t>Develop </a:t>
+            </a:r>
+            <a:r>
+              <a:rPr lang="en-US" sz="1800" dirty="0">
+                <a:cs typeface="Arial" panose="020B0604020202020204" pitchFamily="34" charset="0"/>
+              </a:rPr>
+              <a:t>a Project Charter to define the project's scope and objectives, analyzing the scenario to create a Stakeholder Register, and preparing a Stakeholder Engagement Plan </a:t>
+            </a:r>
           </a:p>
           <a:p>
             <a:pPr marL="457200" indent="-457200">
@@ -21932,8 +22156,19 @@
               <a:rPr lang="en-US" sz="1800" dirty="0">
                 <a:cs typeface="Arial" panose="020B0604020202020204" pitchFamily="34" charset="0"/>
               </a:rPr>
-              <a:t> </a:t>
-            </a:r>
+              <a:t>D</a:t>
+            </a:r>
+            <a:r>
+              <a:rPr lang="en-US" sz="1800" dirty="0" smtClean="0"/>
+              <a:t>rafting </a:t>
+            </a:r>
+            <a:r>
+              <a:rPr lang="en-US" sz="1800" dirty="0"/>
+              <a:t>a BRD, developing a Use Case Diagram to model system interactions, and constructing an RTM that links each requirement to business objectives and testing criteria</a:t>
+            </a:r>
+            <a:endParaRPr lang="en-US" sz="1800" dirty="0">
+              <a:cs typeface="Arial" panose="020B0604020202020204" pitchFamily="34" charset="0"/>
+            </a:endParaRPr>
           </a:p>
           <a:p>
             <a:pPr marL="457200" indent="-457200">
@@ -21944,7 +22179,19 @@
               <a:rPr lang="en-US" sz="1800" dirty="0">
                 <a:cs typeface="Arial" panose="020B0604020202020204" pitchFamily="34" charset="0"/>
               </a:rPr>
-              <a:t> </a:t>
+              <a:t>U</a:t>
+            </a:r>
+            <a:r>
+              <a:rPr lang="en-US" sz="1800" dirty="0" smtClean="0">
+                <a:cs typeface="Arial" panose="020B0604020202020204" pitchFamily="34" charset="0"/>
+              </a:rPr>
+              <a:t>se </a:t>
+            </a:r>
+            <a:r>
+              <a:rPr lang="en-US" sz="1800" dirty="0">
+                <a:cs typeface="Arial" panose="020B0604020202020204" pitchFamily="34" charset="0"/>
+              </a:rPr>
+              <a:t>key project artifacts, including the Work Breakdown Structure (WBS), Network Diagram, SWOT Analysis, Risk Register, and Risk Matrix, to manage tasks, timelines, and potential risks.</a:t>
             </a:r>
           </a:p>
           <a:p>
@@ -21953,11 +22200,22 @@
               <a:buAutoNum type="arabicPeriod"/>
             </a:pPr>
             <a:r>
-              <a:rPr lang="en-US" sz="1800" dirty="0">
+              <a:rPr lang="en-US" sz="1800" dirty="0" smtClean="0"/>
+              <a:t>Developing </a:t>
+            </a:r>
+            <a:r>
+              <a:rPr lang="en-US" sz="1800" dirty="0"/>
+              <a:t>a UML-compliant flowchart for the appointment scheduling process, a critical workflow within the XYZ Health Solutions IT System Integration initiative.</a:t>
+            </a:r>
+            <a:r>
+              <a:rPr lang="en-US" sz="1800" dirty="0" smtClean="0">
                 <a:cs typeface="Arial" panose="020B0604020202020204" pitchFamily="34" charset="0"/>
               </a:rPr>
               <a:t> </a:t>
             </a:r>
+            <a:endParaRPr lang="en-US" sz="1800" dirty="0">
+              <a:cs typeface="Arial" panose="020B0604020202020204" pitchFamily="34" charset="0"/>
+            </a:endParaRPr>
           </a:p>
           <a:p>
             <a:pPr marL="457200" indent="-457200">
@@ -21968,8 +22226,19 @@
               <a:rPr lang="en-US" sz="1800" dirty="0">
                 <a:cs typeface="Arial" panose="020B0604020202020204" pitchFamily="34" charset="0"/>
               </a:rPr>
-              <a:t> </a:t>
-            </a:r>
+              <a:t>C</a:t>
+            </a:r>
+            <a:r>
+              <a:rPr lang="en-US" sz="1800" dirty="0" smtClean="0"/>
+              <a:t>lean </a:t>
+            </a:r>
+            <a:r>
+              <a:rPr lang="en-US" sz="1800" dirty="0"/>
+              <a:t>and transform patient and appointment datasets in preparation for dashboard reporting.</a:t>
+            </a:r>
+            <a:endParaRPr lang="en-US" sz="1800" dirty="0">
+              <a:cs typeface="Arial" panose="020B0604020202020204" pitchFamily="34" charset="0"/>
+            </a:endParaRPr>
           </a:p>
           <a:p>
             <a:pPr marL="457200" indent="-457200">
@@ -21980,7 +22249,19 @@
               <a:rPr lang="en-US" sz="1800" dirty="0">
                 <a:cs typeface="Arial" panose="020B0604020202020204" pitchFamily="34" charset="0"/>
               </a:rPr>
-              <a:t> </a:t>
+              <a:t>C</a:t>
+            </a:r>
+            <a:r>
+              <a:rPr lang="en-US" sz="1800" dirty="0" smtClean="0">
+                <a:cs typeface="Arial" panose="020B0604020202020204" pitchFamily="34" charset="0"/>
+              </a:rPr>
+              <a:t>reating </a:t>
+            </a:r>
+            <a:r>
+              <a:rPr lang="en-US" sz="1800" dirty="0">
+                <a:cs typeface="Arial" panose="020B0604020202020204" pitchFamily="34" charset="0"/>
+              </a:rPr>
+              <a:t>four key diagrams: data flow diagram (DFD), entity-relationship diagram (ERD), use case diagram, and sequence diagram, to visualize system architecture, processes, data relationships, and interactions.</a:t>
             </a:r>
           </a:p>
         </p:txBody>
